--- a/public/fun/pack/pptx/family/가족소개_11_우리부부_라일락골목.pptx
+++ b/public/fun/pack/pptx/family/가족소개_11_우리부부_라일락골목.pptx
@@ -3286,14 +3286,6 @@
 <file path=ppt/slides/slide1.xml><?xml version="1.0" encoding="utf-8"?>
 <p:sld xmlns:a="http://schemas.openxmlformats.org/drawingml/2006/main" xmlns:p="http://schemas.openxmlformats.org/presentationml/2006/main" xmlns:r="http://schemas.openxmlformats.org/officeDocument/2006/relationships">
   <p:cSld>
-    <p:bg>
-      <p:bgPr>
-        <a:solidFill>
-          <a:srgbClr val="FFFFFF"/>
-        </a:solidFill>
-        <a:effectLst/>
-      </p:bgPr>
-    </p:bg>
     <p:spTree>
       <p:nvGrpSpPr>
         <p:cNvPr id="1" name=""/>
@@ -3301,383 +3293,30 @@
         <p:nvPr/>
       </p:nvGrpSpPr>
       <p:grpSpPr/>
-      <p:sp>
-        <p:nvSpPr>
-          <p:cNvPr id="3" name="장식"/>
-          <p:cNvSpPr/>
+      <p:pic>
+        <p:nvPicPr>
+          <p:cNvPr id="3" name="표지 그림" descr="family-11.jpg"/>
+          <p:cNvPicPr>
+            <a:picLocks noChangeAspect="1"/>
+          </p:cNvPicPr>
           <p:nvPr/>
-        </p:nvSpPr>
-        <p:spPr>
-          <a:xfrm>
-            <a:off x="7071183" y="-1714500"/>
-            <a:ext cx="7886700" cy="7886700"/>
-          </a:xfrm>
-          <a:prstGeom prst="ellipse">
+        </p:nvPicPr>
+        <p:blipFill>
+          <a:blip r:embed="rId2"/>
+          <a:stretch>
+            <a:fillRect/>
+          </a:stretch>
+        </p:blipFill>
+        <p:spPr>
+          <a:xfrm>
+            <a:off x="0" y="0"/>
+            <a:ext cx="12191695" cy="6858000"/>
+          </a:xfrm>
+          <a:prstGeom prst="rect">
             <a:avLst/>
           </a:prstGeom>
-          <a:solidFill>
-            <a:srgbClr val="E3D3EE"/>
-          </a:solidFill>
-          <a:ln>
-            <a:noFill/>
-          </a:ln>
-        </p:spPr>
-        <p:txBody>
-          <a:bodyPr rtlCol="0" anchor="ctr"/>
-          <a:lstStyle/>
-          <a:p>
-            <a:pPr algn="ctr"/>
-          </a:p>
-        </p:txBody>
-      </p:sp>
-      <p:sp>
-        <p:nvSpPr>
-          <p:cNvPr id="4" name="장식"/>
-          <p:cNvSpPr/>
-          <p:nvPr/>
-        </p:nvSpPr>
-        <p:spPr>
-          <a:xfrm>
-            <a:off x="9509522" y="3977639"/>
-            <a:ext cx="3429000" cy="3429000"/>
-          </a:xfrm>
-          <a:prstGeom prst="ellipse">
-            <a:avLst/>
-          </a:prstGeom>
-          <a:solidFill>
-            <a:srgbClr val="8C56B3"/>
-          </a:solidFill>
-          <a:ln>
-            <a:noFill/>
-          </a:ln>
-        </p:spPr>
-        <p:txBody>
-          <a:bodyPr rtlCol="0" anchor="ctr"/>
-          <a:lstStyle/>
-          <a:p>
-            <a:pPr algn="ctr"/>
-          </a:p>
-        </p:txBody>
-      </p:sp>
-      <p:sp>
-        <p:nvSpPr>
-          <p:cNvPr id="5" name="장식"/>
-          <p:cNvSpPr/>
-          <p:nvPr/>
-        </p:nvSpPr>
-        <p:spPr>
-          <a:xfrm>
-            <a:off x="8548094" y="665468"/>
-            <a:ext cx="439711" cy="439711"/>
-          </a:xfrm>
-          <a:prstGeom prst="ellipse">
-            <a:avLst/>
-          </a:prstGeom>
-          <a:solidFill>
-            <a:srgbClr val="8C56B3"/>
-          </a:solidFill>
-          <a:ln>
-            <a:noFill/>
-          </a:ln>
-        </p:spPr>
-        <p:txBody>
-          <a:bodyPr rtlCol="0" anchor="ctr"/>
-          <a:lstStyle/>
-          <a:p>
-            <a:pPr algn="ctr"/>
-          </a:p>
-        </p:txBody>
-      </p:sp>
-      <p:sp>
-        <p:nvSpPr>
-          <p:cNvPr id="6" name="장식"/>
-          <p:cNvSpPr/>
-          <p:nvPr/>
-        </p:nvSpPr>
-        <p:spPr>
-          <a:xfrm>
-            <a:off x="9870174" y="2648211"/>
-            <a:ext cx="325546" cy="325546"/>
-          </a:xfrm>
-          <a:prstGeom prst="ellipse">
-            <a:avLst/>
-          </a:prstGeom>
-          <a:solidFill>
-            <a:srgbClr val="E3D3EE"/>
-          </a:solidFill>
-          <a:ln>
-            <a:noFill/>
-          </a:ln>
-        </p:spPr>
-        <p:txBody>
-          <a:bodyPr rtlCol="0" anchor="ctr"/>
-          <a:lstStyle/>
-          <a:p>
-            <a:pPr algn="ctr"/>
-          </a:p>
-        </p:txBody>
-      </p:sp>
-      <p:sp>
-        <p:nvSpPr>
-          <p:cNvPr id="7" name="장식"/>
-          <p:cNvSpPr/>
-          <p:nvPr/>
-        </p:nvSpPr>
-        <p:spPr>
-          <a:xfrm>
-            <a:off x="10456902" y="844189"/>
-            <a:ext cx="428847" cy="428847"/>
-          </a:xfrm>
-          <a:prstGeom prst="ellipse">
-            <a:avLst/>
-          </a:prstGeom>
-          <a:solidFill>
-            <a:srgbClr val="868D3F"/>
-          </a:solidFill>
-          <a:ln>
-            <a:noFill/>
-          </a:ln>
-        </p:spPr>
-        <p:txBody>
-          <a:bodyPr rtlCol="0" anchor="ctr"/>
-          <a:lstStyle/>
-          <a:p>
-            <a:pPr algn="ctr"/>
-          </a:p>
-        </p:txBody>
-      </p:sp>
-      <p:sp>
-        <p:nvSpPr>
-          <p:cNvPr id="8" name="장식"/>
-          <p:cNvSpPr/>
-          <p:nvPr/>
-        </p:nvSpPr>
-        <p:spPr>
-          <a:xfrm>
-            <a:off x="10327883" y="2558810"/>
-            <a:ext cx="383917" cy="383917"/>
-          </a:xfrm>
-          <a:prstGeom prst="ellipse">
-            <a:avLst/>
-          </a:prstGeom>
-          <a:solidFill>
-            <a:srgbClr val="8C56B3"/>
-          </a:solidFill>
-          <a:ln>
-            <a:noFill/>
-          </a:ln>
-        </p:spPr>
-        <p:txBody>
-          <a:bodyPr rtlCol="0" anchor="ctr"/>
-          <a:lstStyle/>
-          <a:p>
-            <a:pPr algn="ctr"/>
-          </a:p>
-        </p:txBody>
-      </p:sp>
-      <p:sp>
-        <p:nvSpPr>
-          <p:cNvPr id="9" name="장식"/>
-          <p:cNvSpPr/>
-          <p:nvPr/>
-        </p:nvSpPr>
-        <p:spPr>
-          <a:xfrm>
-            <a:off x="8985224" y="371263"/>
-            <a:ext cx="271256" cy="271256"/>
-          </a:xfrm>
-          <a:prstGeom prst="ellipse">
-            <a:avLst/>
-          </a:prstGeom>
-          <a:solidFill>
-            <a:srgbClr val="E3D3EE"/>
-          </a:solidFill>
-          <a:ln>
-            <a:noFill/>
-          </a:ln>
-        </p:spPr>
-        <p:txBody>
-          <a:bodyPr rtlCol="0" anchor="ctr"/>
-          <a:lstStyle/>
-          <a:p>
-            <a:pPr algn="ctr"/>
-          </a:p>
-        </p:txBody>
-      </p:sp>
-      <p:sp>
-        <p:nvSpPr>
-          <p:cNvPr id="10" name="장식"/>
-          <p:cNvSpPr/>
-          <p:nvPr/>
-        </p:nvSpPr>
-        <p:spPr>
-          <a:xfrm>
-            <a:off x="10054636" y="427995"/>
-            <a:ext cx="294091" cy="294091"/>
-          </a:xfrm>
-          <a:prstGeom prst="ellipse">
-            <a:avLst/>
-          </a:prstGeom>
-          <a:solidFill>
-            <a:srgbClr val="868D3F"/>
-          </a:solidFill>
-          <a:ln>
-            <a:noFill/>
-          </a:ln>
-        </p:spPr>
-        <p:txBody>
-          <a:bodyPr rtlCol="0" anchor="ctr"/>
-          <a:lstStyle/>
-          <a:p>
-            <a:pPr algn="ctr"/>
-          </a:p>
-        </p:txBody>
-      </p:sp>
-      <p:sp>
-        <p:nvSpPr>
-          <p:cNvPr id="11" name="장식"/>
-          <p:cNvSpPr/>
-          <p:nvPr/>
-        </p:nvSpPr>
-        <p:spPr>
-          <a:xfrm>
-            <a:off x="10539235" y="2844566"/>
-            <a:ext cx="506986" cy="506986"/>
-          </a:xfrm>
-          <a:prstGeom prst="ellipse">
-            <a:avLst/>
-          </a:prstGeom>
-          <a:solidFill>
-            <a:srgbClr val="8C56B3"/>
-          </a:solidFill>
-          <a:ln>
-            <a:noFill/>
-          </a:ln>
-        </p:spPr>
-        <p:txBody>
-          <a:bodyPr rtlCol="0" anchor="ctr"/>
-          <a:lstStyle/>
-          <a:p>
-            <a:pPr algn="ctr"/>
-          </a:p>
-        </p:txBody>
-      </p:sp>
-      <p:sp>
-        <p:nvSpPr>
-          <p:cNvPr id="12" name="장식"/>
-          <p:cNvSpPr/>
-          <p:nvPr/>
-        </p:nvSpPr>
-        <p:spPr>
-          <a:xfrm>
-            <a:off x="9714677" y="793042"/>
-            <a:ext cx="486841" cy="486841"/>
-          </a:xfrm>
-          <a:prstGeom prst="ellipse">
-            <a:avLst/>
-          </a:prstGeom>
-          <a:solidFill>
-            <a:srgbClr val="E3D3EE"/>
-          </a:solidFill>
-          <a:ln>
-            <a:noFill/>
-          </a:ln>
-        </p:spPr>
-        <p:txBody>
-          <a:bodyPr rtlCol="0" anchor="ctr"/>
-          <a:lstStyle/>
-          <a:p>
-            <a:pPr algn="ctr"/>
-          </a:p>
-        </p:txBody>
-      </p:sp>
-      <p:sp>
-        <p:nvSpPr>
-          <p:cNvPr id="13" name="장식"/>
-          <p:cNvSpPr/>
-          <p:nvPr/>
-        </p:nvSpPr>
-        <p:spPr>
-          <a:xfrm>
-            <a:off x="9093804" y="730731"/>
-            <a:ext cx="496258" cy="496258"/>
-          </a:xfrm>
-          <a:prstGeom prst="ellipse">
-            <a:avLst/>
-          </a:prstGeom>
-          <a:solidFill>
-            <a:srgbClr val="868D3F"/>
-          </a:solidFill>
-          <a:ln>
-            <a:noFill/>
-          </a:ln>
-        </p:spPr>
-        <p:txBody>
-          <a:bodyPr rtlCol="0" anchor="ctr"/>
-          <a:lstStyle/>
-          <a:p>
-            <a:pPr algn="ctr"/>
-          </a:p>
-        </p:txBody>
-      </p:sp>
-      <p:sp>
-        <p:nvSpPr>
-          <p:cNvPr id="14" name="장식"/>
-          <p:cNvSpPr/>
-          <p:nvPr/>
-        </p:nvSpPr>
-        <p:spPr>
-          <a:xfrm>
-            <a:off x="8263488" y="21126"/>
-            <a:ext cx="405194" cy="405194"/>
-          </a:xfrm>
-          <a:prstGeom prst="ellipse">
-            <a:avLst/>
-          </a:prstGeom>
-          <a:solidFill>
-            <a:srgbClr val="8C56B3"/>
-          </a:solidFill>
-          <a:ln>
-            <a:noFill/>
-          </a:ln>
-        </p:spPr>
-        <p:txBody>
-          <a:bodyPr rtlCol="0" anchor="ctr"/>
-          <a:lstStyle/>
-          <a:p>
-            <a:pPr algn="ctr"/>
-          </a:p>
-        </p:txBody>
-      </p:sp>
-      <p:sp>
-        <p:nvSpPr>
-          <p:cNvPr id="15" name="장식"/>
-          <p:cNvSpPr/>
-          <p:nvPr/>
-        </p:nvSpPr>
-        <p:spPr>
-          <a:xfrm>
-            <a:off x="10553950" y="2861152"/>
-            <a:ext cx="241523" cy="241523"/>
-          </a:xfrm>
-          <a:prstGeom prst="ellipse">
-            <a:avLst/>
-          </a:prstGeom>
-          <a:solidFill>
-            <a:srgbClr val="E3D3EE"/>
-          </a:solidFill>
-          <a:ln>
-            <a:noFill/>
-          </a:ln>
-        </p:spPr>
-        <p:txBody>
-          <a:bodyPr rtlCol="0" anchor="ctr"/>
-          <a:lstStyle/>
-          <a:p>
-            <a:pPr algn="ctr"/>
-          </a:p>
-        </p:txBody>
-      </p:sp>
+        </p:spPr>
+      </p:pic>
       <p:sp>
         <p:nvSpPr>
           <p:cNvPr id="2" name="Title 1"/>
@@ -3691,7 +3330,7 @@
         <p:spPr>
           <a:xfrm>
             <a:off x="853418" y="2057400"/>
-            <a:ext cx="6705432" cy="1463040"/>
+            <a:ext cx="6095847" cy="1554480"/>
           </a:xfrm>
         </p:spPr>
         <p:txBody>
@@ -3718,13 +3357,13 @@
       </p:sp>
       <p:sp>
         <p:nvSpPr>
-          <p:cNvPr id="16" name="한 줄 문구"/>
+          <p:cNvPr id="4" name="한 줄 문구"/>
           <p:cNvSpPr txBox="1"/>
           <p:nvPr/>
         </p:nvSpPr>
         <p:spPr>
           <a:xfrm>
-            <a:off x="853418" y="3611880"/>
+            <a:off x="853418" y="3749039"/>
             <a:ext cx="6095847" cy="822960"/>
           </a:xfrm>
           <a:prstGeom prst="rect">
@@ -3749,20 +3388,20 @@
                   <a:srgbClr val="573371"/>
                 </a:solidFill>
               </a:rPr>
-              <a:t>라일락 향기가 나는 우리 동네 이야기</a:t>
-            </a:r>
-          </a:p>
-        </p:txBody>
-      </p:sp>
-      <p:sp>
-        <p:nvSpPr>
-          <p:cNvPr id="17" name="안내 문구"/>
+              <a:t>라일락 골목을 걷다 멈춘 저녁</a:t>
+            </a:r>
+          </a:p>
+        </p:txBody>
+      </p:sp>
+      <p:sp>
+        <p:nvSpPr>
+          <p:cNvPr id="5" name="안내 문구"/>
           <p:cNvSpPr txBox="1"/>
           <p:nvPr/>
         </p:nvSpPr>
         <p:spPr>
           <a:xfrm>
-            <a:off x="853418" y="4480560"/>
+            <a:off x="853418" y="4617720"/>
             <a:ext cx="6095847" cy="914400"/>
           </a:xfrm>
           <a:prstGeom prst="rect">
@@ -3787,7 +3426,7 @@
                   <a:srgbClr val="666666"/>
                 </a:solidFill>
               </a:rPr>
-              <a:t>우리 부부 · 2026. 00. 00</a:t>
+              <a:t>우리 부부 · 2027. 00. 00</a:t>
             </a:r>
           </a:p>
         </p:txBody>
@@ -3878,325 +3517,6 @@
       </p:sp>
       <p:sp>
         <p:nvSpPr>
-          <p:cNvPr id="5" name="장식"/>
-          <p:cNvSpPr/>
-          <p:nvPr/>
-        </p:nvSpPr>
-        <p:spPr>
-          <a:xfrm>
-            <a:off x="10902130" y="434860"/>
-            <a:ext cx="153549" cy="153549"/>
-          </a:xfrm>
-          <a:prstGeom prst="ellipse">
-            <a:avLst/>
-          </a:prstGeom>
-          <a:solidFill>
-            <a:srgbClr val="8C56B3"/>
-          </a:solidFill>
-          <a:ln>
-            <a:noFill/>
-          </a:ln>
-        </p:spPr>
-        <p:txBody>
-          <a:bodyPr rtlCol="0" anchor="ctr"/>
-          <a:lstStyle/>
-          <a:p>
-            <a:pPr algn="ctr"/>
-          </a:p>
-        </p:txBody>
-      </p:sp>
-      <p:sp>
-        <p:nvSpPr>
-          <p:cNvPr id="6" name="장식"/>
-          <p:cNvSpPr/>
-          <p:nvPr/>
-        </p:nvSpPr>
-        <p:spPr>
-          <a:xfrm>
-            <a:off x="11363808" y="1127246"/>
-            <a:ext cx="113682" cy="113682"/>
-          </a:xfrm>
-          <a:prstGeom prst="ellipse">
-            <a:avLst/>
-          </a:prstGeom>
-          <a:solidFill>
-            <a:srgbClr val="E3D3EE"/>
-          </a:solidFill>
-          <a:ln>
-            <a:noFill/>
-          </a:ln>
-        </p:spPr>
-        <p:txBody>
-          <a:bodyPr rtlCol="0" anchor="ctr"/>
-          <a:lstStyle/>
-          <a:p>
-            <a:pPr algn="ctr"/>
-          </a:p>
-        </p:txBody>
-      </p:sp>
-      <p:sp>
-        <p:nvSpPr>
-          <p:cNvPr id="7" name="장식"/>
-          <p:cNvSpPr/>
-          <p:nvPr/>
-        </p:nvSpPr>
-        <p:spPr>
-          <a:xfrm>
-            <a:off x="11568698" y="497270"/>
-            <a:ext cx="149756" cy="149756"/>
-          </a:xfrm>
-          <a:prstGeom prst="ellipse">
-            <a:avLst/>
-          </a:prstGeom>
-          <a:solidFill>
-            <a:srgbClr val="868D3F"/>
-          </a:solidFill>
-          <a:ln>
-            <a:noFill/>
-          </a:ln>
-        </p:spPr>
-        <p:txBody>
-          <a:bodyPr rtlCol="0" anchor="ctr"/>
-          <a:lstStyle/>
-          <a:p>
-            <a:pPr algn="ctr"/>
-          </a:p>
-        </p:txBody>
-      </p:sp>
-      <p:sp>
-        <p:nvSpPr>
-          <p:cNvPr id="8" name="장식"/>
-          <p:cNvSpPr/>
-          <p:nvPr/>
-        </p:nvSpPr>
-        <p:spPr>
-          <a:xfrm>
-            <a:off x="11523643" y="1096027"/>
-            <a:ext cx="134066" cy="134066"/>
-          </a:xfrm>
-          <a:prstGeom prst="ellipse">
-            <a:avLst/>
-          </a:prstGeom>
-          <a:solidFill>
-            <a:srgbClr val="8C56B3"/>
-          </a:solidFill>
-          <a:ln>
-            <a:noFill/>
-          </a:ln>
-        </p:spPr>
-        <p:txBody>
-          <a:bodyPr rtlCol="0" anchor="ctr"/>
-          <a:lstStyle/>
-          <a:p>
-            <a:pPr algn="ctr"/>
-          </a:p>
-        </p:txBody>
-      </p:sp>
-      <p:sp>
-        <p:nvSpPr>
-          <p:cNvPr id="9" name="장식"/>
-          <p:cNvSpPr/>
-          <p:nvPr/>
-        </p:nvSpPr>
-        <p:spPr>
-          <a:xfrm>
-            <a:off x="11054778" y="332121"/>
-            <a:ext cx="94724" cy="94724"/>
-          </a:xfrm>
-          <a:prstGeom prst="ellipse">
-            <a:avLst/>
-          </a:prstGeom>
-          <a:solidFill>
-            <a:srgbClr val="E3D3EE"/>
-          </a:solidFill>
-          <a:ln>
-            <a:noFill/>
-          </a:ln>
-        </p:spPr>
-        <p:txBody>
-          <a:bodyPr rtlCol="0" anchor="ctr"/>
-          <a:lstStyle/>
-          <a:p>
-            <a:pPr algn="ctr"/>
-          </a:p>
-        </p:txBody>
-      </p:sp>
-      <p:sp>
-        <p:nvSpPr>
-          <p:cNvPr id="10" name="장식"/>
-          <p:cNvSpPr/>
-          <p:nvPr/>
-        </p:nvSpPr>
-        <p:spPr>
-          <a:xfrm>
-            <a:off x="11428224" y="351933"/>
-            <a:ext cx="102698" cy="102698"/>
-          </a:xfrm>
-          <a:prstGeom prst="ellipse">
-            <a:avLst/>
-          </a:prstGeom>
-          <a:solidFill>
-            <a:srgbClr val="868D3F"/>
-          </a:solidFill>
-          <a:ln>
-            <a:noFill/>
-          </a:ln>
-        </p:spPr>
-        <p:txBody>
-          <a:bodyPr rtlCol="0" anchor="ctr"/>
-          <a:lstStyle/>
-          <a:p>
-            <a:pPr algn="ctr"/>
-          </a:p>
-        </p:txBody>
-      </p:sp>
-      <p:sp>
-        <p:nvSpPr>
-          <p:cNvPr id="11" name="장식"/>
-          <p:cNvSpPr/>
-          <p:nvPr/>
-        </p:nvSpPr>
-        <p:spPr>
-          <a:xfrm>
-            <a:off x="11597449" y="1195815"/>
-            <a:ext cx="177042" cy="177042"/>
-          </a:xfrm>
-          <a:prstGeom prst="ellipse">
-            <a:avLst/>
-          </a:prstGeom>
-          <a:solidFill>
-            <a:srgbClr val="8C56B3"/>
-          </a:solidFill>
-          <a:ln>
-            <a:noFill/>
-          </a:ln>
-        </p:spPr>
-        <p:txBody>
-          <a:bodyPr rtlCol="0" anchor="ctr"/>
-          <a:lstStyle/>
-          <a:p>
-            <a:pPr algn="ctr"/>
-          </a:p>
-        </p:txBody>
-      </p:sp>
-      <p:sp>
-        <p:nvSpPr>
-          <p:cNvPr id="12" name="장식"/>
-          <p:cNvSpPr/>
-          <p:nvPr/>
-        </p:nvSpPr>
-        <p:spPr>
-          <a:xfrm>
-            <a:off x="11309508" y="479409"/>
-            <a:ext cx="170008" cy="170008"/>
-          </a:xfrm>
-          <a:prstGeom prst="ellipse">
-            <a:avLst/>
-          </a:prstGeom>
-          <a:solidFill>
-            <a:srgbClr val="E3D3EE"/>
-          </a:solidFill>
-          <a:ln>
-            <a:noFill/>
-          </a:ln>
-        </p:spPr>
-        <p:txBody>
-          <a:bodyPr rtlCol="0" anchor="ctr"/>
-          <a:lstStyle/>
-          <a:p>
-            <a:pPr algn="ctr"/>
-          </a:p>
-        </p:txBody>
-      </p:sp>
-      <p:sp>
-        <p:nvSpPr>
-          <p:cNvPr id="13" name="장식"/>
-          <p:cNvSpPr/>
-          <p:nvPr/>
-        </p:nvSpPr>
-        <p:spPr>
-          <a:xfrm>
-            <a:off x="11092695" y="457650"/>
-            <a:ext cx="173296" cy="173296"/>
-          </a:xfrm>
-          <a:prstGeom prst="ellipse">
-            <a:avLst/>
-          </a:prstGeom>
-          <a:solidFill>
-            <a:srgbClr val="868D3F"/>
-          </a:solidFill>
-          <a:ln>
-            <a:noFill/>
-          </a:ln>
-        </p:spPr>
-        <p:txBody>
-          <a:bodyPr rtlCol="0" anchor="ctr"/>
-          <a:lstStyle/>
-          <a:p>
-            <a:pPr algn="ctr"/>
-          </a:p>
-        </p:txBody>
-      </p:sp>
-      <p:sp>
-        <p:nvSpPr>
-          <p:cNvPr id="14" name="장식"/>
-          <p:cNvSpPr/>
-          <p:nvPr/>
-        </p:nvSpPr>
-        <p:spPr>
-          <a:xfrm>
-            <a:off x="10802743" y="209851"/>
-            <a:ext cx="141496" cy="141496"/>
-          </a:xfrm>
-          <a:prstGeom prst="ellipse">
-            <a:avLst/>
-          </a:prstGeom>
-          <a:solidFill>
-            <a:srgbClr val="8C56B3"/>
-          </a:solidFill>
-          <a:ln>
-            <a:noFill/>
-          </a:ln>
-        </p:spPr>
-        <p:txBody>
-          <a:bodyPr rtlCol="0" anchor="ctr"/>
-          <a:lstStyle/>
-          <a:p>
-            <a:pPr algn="ctr"/>
-          </a:p>
-        </p:txBody>
-      </p:sp>
-      <p:sp>
-        <p:nvSpPr>
-          <p:cNvPr id="15" name="장식"/>
-          <p:cNvSpPr/>
-          <p:nvPr/>
-        </p:nvSpPr>
-        <p:spPr>
-          <a:xfrm>
-            <a:off x="11602587" y="1201606"/>
-            <a:ext cx="84341" cy="84341"/>
-          </a:xfrm>
-          <a:prstGeom prst="ellipse">
-            <a:avLst/>
-          </a:prstGeom>
-          <a:solidFill>
-            <a:srgbClr val="E3D3EE"/>
-          </a:solidFill>
-          <a:ln>
-            <a:noFill/>
-          </a:ln>
-        </p:spPr>
-        <p:txBody>
-          <a:bodyPr rtlCol="0" anchor="ctr"/>
-          <a:lstStyle/>
-          <a:p>
-            <a:pPr algn="ctr"/>
-          </a:p>
-        </p:txBody>
-      </p:sp>
-      <p:sp>
-        <p:nvSpPr>
           <p:cNvPr id="2" name="Title 1"/>
           <p:cNvSpPr>
             <a:spLocks noGrp="1"/>
@@ -4235,7 +3555,7 @@
       </p:sp>
       <p:sp>
         <p:nvSpPr>
-          <p:cNvPr id="16" name="사진 자리"/>
+          <p:cNvPr id="5" name="사진 자리"/>
           <p:cNvSpPr/>
           <p:nvPr/>
         </p:nvSpPr>
@@ -4281,7 +3601,7 @@
       </p:sp>
       <p:sp>
         <p:nvSpPr>
-          <p:cNvPr id="17" name="TextBox 16"/>
+          <p:cNvPr id="6" name="TextBox 5"/>
           <p:cNvSpPr txBox="1"/>
           <p:nvPr/>
         </p:nvSpPr>
@@ -4319,7 +3639,7 @@
       </p:sp>
       <p:sp>
         <p:nvSpPr>
-          <p:cNvPr id="18" name="TextBox 17"/>
+          <p:cNvPr id="7" name="TextBox 6"/>
           <p:cNvSpPr txBox="1"/>
           <p:nvPr/>
         </p:nvSpPr>
@@ -4387,7 +3707,7 @@
       </p:sp>
       <p:sp>
         <p:nvSpPr>
-          <p:cNvPr id="19" name="사진 자리"/>
+          <p:cNvPr id="8" name="사진 자리"/>
           <p:cNvSpPr/>
           <p:nvPr/>
         </p:nvSpPr>
@@ -4433,7 +3753,7 @@
       </p:sp>
       <p:sp>
         <p:nvSpPr>
-          <p:cNvPr id="20" name="TextBox 19"/>
+          <p:cNvPr id="9" name="TextBox 8"/>
           <p:cNvSpPr txBox="1"/>
           <p:nvPr/>
         </p:nvSpPr>
@@ -4471,7 +3791,7 @@
       </p:sp>
       <p:sp>
         <p:nvSpPr>
-          <p:cNvPr id="21" name="TextBox 20"/>
+          <p:cNvPr id="10" name="TextBox 9"/>
           <p:cNvSpPr txBox="1"/>
           <p:nvPr/>
         </p:nvSpPr>
@@ -4623,325 +3943,6 @@
       </p:sp>
       <p:sp>
         <p:nvSpPr>
-          <p:cNvPr id="5" name="장식"/>
-          <p:cNvSpPr/>
-          <p:nvPr/>
-        </p:nvSpPr>
-        <p:spPr>
-          <a:xfrm>
-            <a:off x="10902130" y="434860"/>
-            <a:ext cx="153549" cy="153549"/>
-          </a:xfrm>
-          <a:prstGeom prst="ellipse">
-            <a:avLst/>
-          </a:prstGeom>
-          <a:solidFill>
-            <a:srgbClr val="8C56B3"/>
-          </a:solidFill>
-          <a:ln>
-            <a:noFill/>
-          </a:ln>
-        </p:spPr>
-        <p:txBody>
-          <a:bodyPr rtlCol="0" anchor="ctr"/>
-          <a:lstStyle/>
-          <a:p>
-            <a:pPr algn="ctr"/>
-          </a:p>
-        </p:txBody>
-      </p:sp>
-      <p:sp>
-        <p:nvSpPr>
-          <p:cNvPr id="6" name="장식"/>
-          <p:cNvSpPr/>
-          <p:nvPr/>
-        </p:nvSpPr>
-        <p:spPr>
-          <a:xfrm>
-            <a:off x="11363808" y="1127246"/>
-            <a:ext cx="113682" cy="113682"/>
-          </a:xfrm>
-          <a:prstGeom prst="ellipse">
-            <a:avLst/>
-          </a:prstGeom>
-          <a:solidFill>
-            <a:srgbClr val="E3D3EE"/>
-          </a:solidFill>
-          <a:ln>
-            <a:noFill/>
-          </a:ln>
-        </p:spPr>
-        <p:txBody>
-          <a:bodyPr rtlCol="0" anchor="ctr"/>
-          <a:lstStyle/>
-          <a:p>
-            <a:pPr algn="ctr"/>
-          </a:p>
-        </p:txBody>
-      </p:sp>
-      <p:sp>
-        <p:nvSpPr>
-          <p:cNvPr id="7" name="장식"/>
-          <p:cNvSpPr/>
-          <p:nvPr/>
-        </p:nvSpPr>
-        <p:spPr>
-          <a:xfrm>
-            <a:off x="11568698" y="497270"/>
-            <a:ext cx="149756" cy="149756"/>
-          </a:xfrm>
-          <a:prstGeom prst="ellipse">
-            <a:avLst/>
-          </a:prstGeom>
-          <a:solidFill>
-            <a:srgbClr val="868D3F"/>
-          </a:solidFill>
-          <a:ln>
-            <a:noFill/>
-          </a:ln>
-        </p:spPr>
-        <p:txBody>
-          <a:bodyPr rtlCol="0" anchor="ctr"/>
-          <a:lstStyle/>
-          <a:p>
-            <a:pPr algn="ctr"/>
-          </a:p>
-        </p:txBody>
-      </p:sp>
-      <p:sp>
-        <p:nvSpPr>
-          <p:cNvPr id="8" name="장식"/>
-          <p:cNvSpPr/>
-          <p:nvPr/>
-        </p:nvSpPr>
-        <p:spPr>
-          <a:xfrm>
-            <a:off x="11523643" y="1096027"/>
-            <a:ext cx="134066" cy="134066"/>
-          </a:xfrm>
-          <a:prstGeom prst="ellipse">
-            <a:avLst/>
-          </a:prstGeom>
-          <a:solidFill>
-            <a:srgbClr val="8C56B3"/>
-          </a:solidFill>
-          <a:ln>
-            <a:noFill/>
-          </a:ln>
-        </p:spPr>
-        <p:txBody>
-          <a:bodyPr rtlCol="0" anchor="ctr"/>
-          <a:lstStyle/>
-          <a:p>
-            <a:pPr algn="ctr"/>
-          </a:p>
-        </p:txBody>
-      </p:sp>
-      <p:sp>
-        <p:nvSpPr>
-          <p:cNvPr id="9" name="장식"/>
-          <p:cNvSpPr/>
-          <p:nvPr/>
-        </p:nvSpPr>
-        <p:spPr>
-          <a:xfrm>
-            <a:off x="11054778" y="332121"/>
-            <a:ext cx="94724" cy="94724"/>
-          </a:xfrm>
-          <a:prstGeom prst="ellipse">
-            <a:avLst/>
-          </a:prstGeom>
-          <a:solidFill>
-            <a:srgbClr val="E3D3EE"/>
-          </a:solidFill>
-          <a:ln>
-            <a:noFill/>
-          </a:ln>
-        </p:spPr>
-        <p:txBody>
-          <a:bodyPr rtlCol="0" anchor="ctr"/>
-          <a:lstStyle/>
-          <a:p>
-            <a:pPr algn="ctr"/>
-          </a:p>
-        </p:txBody>
-      </p:sp>
-      <p:sp>
-        <p:nvSpPr>
-          <p:cNvPr id="10" name="장식"/>
-          <p:cNvSpPr/>
-          <p:nvPr/>
-        </p:nvSpPr>
-        <p:spPr>
-          <a:xfrm>
-            <a:off x="11428224" y="351933"/>
-            <a:ext cx="102698" cy="102698"/>
-          </a:xfrm>
-          <a:prstGeom prst="ellipse">
-            <a:avLst/>
-          </a:prstGeom>
-          <a:solidFill>
-            <a:srgbClr val="868D3F"/>
-          </a:solidFill>
-          <a:ln>
-            <a:noFill/>
-          </a:ln>
-        </p:spPr>
-        <p:txBody>
-          <a:bodyPr rtlCol="0" anchor="ctr"/>
-          <a:lstStyle/>
-          <a:p>
-            <a:pPr algn="ctr"/>
-          </a:p>
-        </p:txBody>
-      </p:sp>
-      <p:sp>
-        <p:nvSpPr>
-          <p:cNvPr id="11" name="장식"/>
-          <p:cNvSpPr/>
-          <p:nvPr/>
-        </p:nvSpPr>
-        <p:spPr>
-          <a:xfrm>
-            <a:off x="11597449" y="1195815"/>
-            <a:ext cx="177042" cy="177042"/>
-          </a:xfrm>
-          <a:prstGeom prst="ellipse">
-            <a:avLst/>
-          </a:prstGeom>
-          <a:solidFill>
-            <a:srgbClr val="8C56B3"/>
-          </a:solidFill>
-          <a:ln>
-            <a:noFill/>
-          </a:ln>
-        </p:spPr>
-        <p:txBody>
-          <a:bodyPr rtlCol="0" anchor="ctr"/>
-          <a:lstStyle/>
-          <a:p>
-            <a:pPr algn="ctr"/>
-          </a:p>
-        </p:txBody>
-      </p:sp>
-      <p:sp>
-        <p:nvSpPr>
-          <p:cNvPr id="12" name="장식"/>
-          <p:cNvSpPr/>
-          <p:nvPr/>
-        </p:nvSpPr>
-        <p:spPr>
-          <a:xfrm>
-            <a:off x="11309508" y="479409"/>
-            <a:ext cx="170008" cy="170008"/>
-          </a:xfrm>
-          <a:prstGeom prst="ellipse">
-            <a:avLst/>
-          </a:prstGeom>
-          <a:solidFill>
-            <a:srgbClr val="E3D3EE"/>
-          </a:solidFill>
-          <a:ln>
-            <a:noFill/>
-          </a:ln>
-        </p:spPr>
-        <p:txBody>
-          <a:bodyPr rtlCol="0" anchor="ctr"/>
-          <a:lstStyle/>
-          <a:p>
-            <a:pPr algn="ctr"/>
-          </a:p>
-        </p:txBody>
-      </p:sp>
-      <p:sp>
-        <p:nvSpPr>
-          <p:cNvPr id="13" name="장식"/>
-          <p:cNvSpPr/>
-          <p:nvPr/>
-        </p:nvSpPr>
-        <p:spPr>
-          <a:xfrm>
-            <a:off x="11092695" y="457650"/>
-            <a:ext cx="173296" cy="173296"/>
-          </a:xfrm>
-          <a:prstGeom prst="ellipse">
-            <a:avLst/>
-          </a:prstGeom>
-          <a:solidFill>
-            <a:srgbClr val="868D3F"/>
-          </a:solidFill>
-          <a:ln>
-            <a:noFill/>
-          </a:ln>
-        </p:spPr>
-        <p:txBody>
-          <a:bodyPr rtlCol="0" anchor="ctr"/>
-          <a:lstStyle/>
-          <a:p>
-            <a:pPr algn="ctr"/>
-          </a:p>
-        </p:txBody>
-      </p:sp>
-      <p:sp>
-        <p:nvSpPr>
-          <p:cNvPr id="14" name="장식"/>
-          <p:cNvSpPr/>
-          <p:nvPr/>
-        </p:nvSpPr>
-        <p:spPr>
-          <a:xfrm>
-            <a:off x="10802743" y="209851"/>
-            <a:ext cx="141496" cy="141496"/>
-          </a:xfrm>
-          <a:prstGeom prst="ellipse">
-            <a:avLst/>
-          </a:prstGeom>
-          <a:solidFill>
-            <a:srgbClr val="8C56B3"/>
-          </a:solidFill>
-          <a:ln>
-            <a:noFill/>
-          </a:ln>
-        </p:spPr>
-        <p:txBody>
-          <a:bodyPr rtlCol="0" anchor="ctr"/>
-          <a:lstStyle/>
-          <a:p>
-            <a:pPr algn="ctr"/>
-          </a:p>
-        </p:txBody>
-      </p:sp>
-      <p:sp>
-        <p:nvSpPr>
-          <p:cNvPr id="15" name="장식"/>
-          <p:cNvSpPr/>
-          <p:nvPr/>
-        </p:nvSpPr>
-        <p:spPr>
-          <a:xfrm>
-            <a:off x="11602587" y="1201606"/>
-            <a:ext cx="84341" cy="84341"/>
-          </a:xfrm>
-          <a:prstGeom prst="ellipse">
-            <a:avLst/>
-          </a:prstGeom>
-          <a:solidFill>
-            <a:srgbClr val="E3D3EE"/>
-          </a:solidFill>
-          <a:ln>
-            <a:noFill/>
-          </a:ln>
-        </p:spPr>
-        <p:txBody>
-          <a:bodyPr rtlCol="0" anchor="ctr"/>
-          <a:lstStyle/>
-          <a:p>
-            <a:pPr algn="ctr"/>
-          </a:p>
-        </p:txBody>
-      </p:sp>
-      <p:sp>
-        <p:nvSpPr>
           <p:cNvPr id="2" name="Title 1"/>
           <p:cNvSpPr>
             <a:spLocks noGrp="1"/>
@@ -4980,7 +3981,7 @@
       </p:sp>
       <p:sp>
         <p:nvSpPr>
-          <p:cNvPr id="16" name="타임라인 선"/>
+          <p:cNvPr id="5" name="타임라인 선"/>
           <p:cNvSpPr/>
           <p:nvPr/>
         </p:nvSpPr>
@@ -5009,7 +4010,7 @@
       </p:sp>
       <p:sp>
         <p:nvSpPr>
-          <p:cNvPr id="17" name="때 1"/>
+          <p:cNvPr id="6" name="때 1"/>
           <p:cNvSpPr/>
           <p:nvPr/>
         </p:nvSpPr>
@@ -5040,7 +4041,7 @@
       </p:sp>
       <p:sp>
         <p:nvSpPr>
-          <p:cNvPr id="18" name="TextBox 17"/>
+          <p:cNvPr id="7" name="TextBox 6"/>
           <p:cNvSpPr txBox="1"/>
           <p:nvPr/>
         </p:nvSpPr>
@@ -5078,7 +4079,7 @@
       </p:sp>
       <p:sp>
         <p:nvSpPr>
-          <p:cNvPr id="19" name="TextBox 18"/>
+          <p:cNvPr id="8" name="TextBox 7"/>
           <p:cNvSpPr txBox="1"/>
           <p:nvPr/>
         </p:nvSpPr>
@@ -5116,7 +4117,7 @@
       </p:sp>
       <p:sp>
         <p:nvSpPr>
-          <p:cNvPr id="20" name="TextBox 19"/>
+          <p:cNvPr id="9" name="TextBox 8"/>
           <p:cNvSpPr txBox="1"/>
           <p:nvPr/>
         </p:nvSpPr>
@@ -5154,7 +4155,7 @@
       </p:sp>
       <p:sp>
         <p:nvSpPr>
-          <p:cNvPr id="21" name="때 2"/>
+          <p:cNvPr id="10" name="때 2"/>
           <p:cNvSpPr/>
           <p:nvPr/>
         </p:nvSpPr>
@@ -5185,7 +4186,7 @@
       </p:sp>
       <p:sp>
         <p:nvSpPr>
-          <p:cNvPr id="22" name="TextBox 21"/>
+          <p:cNvPr id="11" name="TextBox 10"/>
           <p:cNvSpPr txBox="1"/>
           <p:nvPr/>
         </p:nvSpPr>
@@ -5223,7 +4224,7 @@
       </p:sp>
       <p:sp>
         <p:nvSpPr>
-          <p:cNvPr id="23" name="TextBox 22"/>
+          <p:cNvPr id="12" name="TextBox 11"/>
           <p:cNvSpPr txBox="1"/>
           <p:nvPr/>
         </p:nvSpPr>
@@ -5261,7 +4262,7 @@
       </p:sp>
       <p:sp>
         <p:nvSpPr>
-          <p:cNvPr id="24" name="TextBox 23"/>
+          <p:cNvPr id="13" name="TextBox 12"/>
           <p:cNvSpPr txBox="1"/>
           <p:nvPr/>
         </p:nvSpPr>
@@ -5299,7 +4300,7 @@
       </p:sp>
       <p:sp>
         <p:nvSpPr>
-          <p:cNvPr id="25" name="때 3"/>
+          <p:cNvPr id="14" name="때 3"/>
           <p:cNvSpPr/>
           <p:nvPr/>
         </p:nvSpPr>
@@ -5330,7 +4331,7 @@
       </p:sp>
       <p:sp>
         <p:nvSpPr>
-          <p:cNvPr id="26" name="TextBox 25"/>
+          <p:cNvPr id="15" name="TextBox 14"/>
           <p:cNvSpPr txBox="1"/>
           <p:nvPr/>
         </p:nvSpPr>
@@ -5368,7 +4369,7 @@
       </p:sp>
       <p:sp>
         <p:nvSpPr>
-          <p:cNvPr id="27" name="TextBox 26"/>
+          <p:cNvPr id="16" name="TextBox 15"/>
           <p:cNvSpPr txBox="1"/>
           <p:nvPr/>
         </p:nvSpPr>
@@ -5406,7 +4407,7 @@
       </p:sp>
       <p:sp>
         <p:nvSpPr>
-          <p:cNvPr id="28" name="TextBox 27"/>
+          <p:cNvPr id="17" name="TextBox 16"/>
           <p:cNvSpPr txBox="1"/>
           <p:nvPr/>
         </p:nvSpPr>
@@ -5444,7 +4445,7 @@
       </p:sp>
       <p:sp>
         <p:nvSpPr>
-          <p:cNvPr id="29" name="때 4"/>
+          <p:cNvPr id="18" name="때 4"/>
           <p:cNvSpPr/>
           <p:nvPr/>
         </p:nvSpPr>
@@ -5475,7 +4476,7 @@
       </p:sp>
       <p:sp>
         <p:nvSpPr>
-          <p:cNvPr id="30" name="TextBox 29"/>
+          <p:cNvPr id="19" name="TextBox 18"/>
           <p:cNvSpPr txBox="1"/>
           <p:nvPr/>
         </p:nvSpPr>
@@ -5513,7 +4514,7 @@
       </p:sp>
       <p:sp>
         <p:nvSpPr>
-          <p:cNvPr id="31" name="TextBox 30"/>
+          <p:cNvPr id="20" name="TextBox 19"/>
           <p:cNvSpPr txBox="1"/>
           <p:nvPr/>
         </p:nvSpPr>
@@ -5551,7 +4552,7 @@
       </p:sp>
       <p:sp>
         <p:nvSpPr>
-          <p:cNvPr id="32" name="TextBox 31"/>
+          <p:cNvPr id="21" name="TextBox 20"/>
           <p:cNvSpPr txBox="1"/>
           <p:nvPr/>
         </p:nvSpPr>
@@ -5673,325 +4674,6 @@
       </p:sp>
       <p:sp>
         <p:nvSpPr>
-          <p:cNvPr id="5" name="장식"/>
-          <p:cNvSpPr/>
-          <p:nvPr/>
-        </p:nvSpPr>
-        <p:spPr>
-          <a:xfrm>
-            <a:off x="10902130" y="434860"/>
-            <a:ext cx="153549" cy="153549"/>
-          </a:xfrm>
-          <a:prstGeom prst="ellipse">
-            <a:avLst/>
-          </a:prstGeom>
-          <a:solidFill>
-            <a:srgbClr val="8C56B3"/>
-          </a:solidFill>
-          <a:ln>
-            <a:noFill/>
-          </a:ln>
-        </p:spPr>
-        <p:txBody>
-          <a:bodyPr rtlCol="0" anchor="ctr"/>
-          <a:lstStyle/>
-          <a:p>
-            <a:pPr algn="ctr"/>
-          </a:p>
-        </p:txBody>
-      </p:sp>
-      <p:sp>
-        <p:nvSpPr>
-          <p:cNvPr id="6" name="장식"/>
-          <p:cNvSpPr/>
-          <p:nvPr/>
-        </p:nvSpPr>
-        <p:spPr>
-          <a:xfrm>
-            <a:off x="11363808" y="1127246"/>
-            <a:ext cx="113682" cy="113682"/>
-          </a:xfrm>
-          <a:prstGeom prst="ellipse">
-            <a:avLst/>
-          </a:prstGeom>
-          <a:solidFill>
-            <a:srgbClr val="E3D3EE"/>
-          </a:solidFill>
-          <a:ln>
-            <a:noFill/>
-          </a:ln>
-        </p:spPr>
-        <p:txBody>
-          <a:bodyPr rtlCol="0" anchor="ctr"/>
-          <a:lstStyle/>
-          <a:p>
-            <a:pPr algn="ctr"/>
-          </a:p>
-        </p:txBody>
-      </p:sp>
-      <p:sp>
-        <p:nvSpPr>
-          <p:cNvPr id="7" name="장식"/>
-          <p:cNvSpPr/>
-          <p:nvPr/>
-        </p:nvSpPr>
-        <p:spPr>
-          <a:xfrm>
-            <a:off x="11568698" y="497270"/>
-            <a:ext cx="149756" cy="149756"/>
-          </a:xfrm>
-          <a:prstGeom prst="ellipse">
-            <a:avLst/>
-          </a:prstGeom>
-          <a:solidFill>
-            <a:srgbClr val="868D3F"/>
-          </a:solidFill>
-          <a:ln>
-            <a:noFill/>
-          </a:ln>
-        </p:spPr>
-        <p:txBody>
-          <a:bodyPr rtlCol="0" anchor="ctr"/>
-          <a:lstStyle/>
-          <a:p>
-            <a:pPr algn="ctr"/>
-          </a:p>
-        </p:txBody>
-      </p:sp>
-      <p:sp>
-        <p:nvSpPr>
-          <p:cNvPr id="8" name="장식"/>
-          <p:cNvSpPr/>
-          <p:nvPr/>
-        </p:nvSpPr>
-        <p:spPr>
-          <a:xfrm>
-            <a:off x="11523643" y="1096027"/>
-            <a:ext cx="134066" cy="134066"/>
-          </a:xfrm>
-          <a:prstGeom prst="ellipse">
-            <a:avLst/>
-          </a:prstGeom>
-          <a:solidFill>
-            <a:srgbClr val="8C56B3"/>
-          </a:solidFill>
-          <a:ln>
-            <a:noFill/>
-          </a:ln>
-        </p:spPr>
-        <p:txBody>
-          <a:bodyPr rtlCol="0" anchor="ctr"/>
-          <a:lstStyle/>
-          <a:p>
-            <a:pPr algn="ctr"/>
-          </a:p>
-        </p:txBody>
-      </p:sp>
-      <p:sp>
-        <p:nvSpPr>
-          <p:cNvPr id="9" name="장식"/>
-          <p:cNvSpPr/>
-          <p:nvPr/>
-        </p:nvSpPr>
-        <p:spPr>
-          <a:xfrm>
-            <a:off x="11054778" y="332121"/>
-            <a:ext cx="94724" cy="94724"/>
-          </a:xfrm>
-          <a:prstGeom prst="ellipse">
-            <a:avLst/>
-          </a:prstGeom>
-          <a:solidFill>
-            <a:srgbClr val="E3D3EE"/>
-          </a:solidFill>
-          <a:ln>
-            <a:noFill/>
-          </a:ln>
-        </p:spPr>
-        <p:txBody>
-          <a:bodyPr rtlCol="0" anchor="ctr"/>
-          <a:lstStyle/>
-          <a:p>
-            <a:pPr algn="ctr"/>
-          </a:p>
-        </p:txBody>
-      </p:sp>
-      <p:sp>
-        <p:nvSpPr>
-          <p:cNvPr id="10" name="장식"/>
-          <p:cNvSpPr/>
-          <p:nvPr/>
-        </p:nvSpPr>
-        <p:spPr>
-          <a:xfrm>
-            <a:off x="11428224" y="351933"/>
-            <a:ext cx="102698" cy="102698"/>
-          </a:xfrm>
-          <a:prstGeom prst="ellipse">
-            <a:avLst/>
-          </a:prstGeom>
-          <a:solidFill>
-            <a:srgbClr val="868D3F"/>
-          </a:solidFill>
-          <a:ln>
-            <a:noFill/>
-          </a:ln>
-        </p:spPr>
-        <p:txBody>
-          <a:bodyPr rtlCol="0" anchor="ctr"/>
-          <a:lstStyle/>
-          <a:p>
-            <a:pPr algn="ctr"/>
-          </a:p>
-        </p:txBody>
-      </p:sp>
-      <p:sp>
-        <p:nvSpPr>
-          <p:cNvPr id="11" name="장식"/>
-          <p:cNvSpPr/>
-          <p:nvPr/>
-        </p:nvSpPr>
-        <p:spPr>
-          <a:xfrm>
-            <a:off x="11597449" y="1195815"/>
-            <a:ext cx="177042" cy="177042"/>
-          </a:xfrm>
-          <a:prstGeom prst="ellipse">
-            <a:avLst/>
-          </a:prstGeom>
-          <a:solidFill>
-            <a:srgbClr val="8C56B3"/>
-          </a:solidFill>
-          <a:ln>
-            <a:noFill/>
-          </a:ln>
-        </p:spPr>
-        <p:txBody>
-          <a:bodyPr rtlCol="0" anchor="ctr"/>
-          <a:lstStyle/>
-          <a:p>
-            <a:pPr algn="ctr"/>
-          </a:p>
-        </p:txBody>
-      </p:sp>
-      <p:sp>
-        <p:nvSpPr>
-          <p:cNvPr id="12" name="장식"/>
-          <p:cNvSpPr/>
-          <p:nvPr/>
-        </p:nvSpPr>
-        <p:spPr>
-          <a:xfrm>
-            <a:off x="11309508" y="479409"/>
-            <a:ext cx="170008" cy="170008"/>
-          </a:xfrm>
-          <a:prstGeom prst="ellipse">
-            <a:avLst/>
-          </a:prstGeom>
-          <a:solidFill>
-            <a:srgbClr val="E3D3EE"/>
-          </a:solidFill>
-          <a:ln>
-            <a:noFill/>
-          </a:ln>
-        </p:spPr>
-        <p:txBody>
-          <a:bodyPr rtlCol="0" anchor="ctr"/>
-          <a:lstStyle/>
-          <a:p>
-            <a:pPr algn="ctr"/>
-          </a:p>
-        </p:txBody>
-      </p:sp>
-      <p:sp>
-        <p:nvSpPr>
-          <p:cNvPr id="13" name="장식"/>
-          <p:cNvSpPr/>
-          <p:nvPr/>
-        </p:nvSpPr>
-        <p:spPr>
-          <a:xfrm>
-            <a:off x="11092695" y="457650"/>
-            <a:ext cx="173296" cy="173296"/>
-          </a:xfrm>
-          <a:prstGeom prst="ellipse">
-            <a:avLst/>
-          </a:prstGeom>
-          <a:solidFill>
-            <a:srgbClr val="868D3F"/>
-          </a:solidFill>
-          <a:ln>
-            <a:noFill/>
-          </a:ln>
-        </p:spPr>
-        <p:txBody>
-          <a:bodyPr rtlCol="0" anchor="ctr"/>
-          <a:lstStyle/>
-          <a:p>
-            <a:pPr algn="ctr"/>
-          </a:p>
-        </p:txBody>
-      </p:sp>
-      <p:sp>
-        <p:nvSpPr>
-          <p:cNvPr id="14" name="장식"/>
-          <p:cNvSpPr/>
-          <p:nvPr/>
-        </p:nvSpPr>
-        <p:spPr>
-          <a:xfrm>
-            <a:off x="10802743" y="209851"/>
-            <a:ext cx="141496" cy="141496"/>
-          </a:xfrm>
-          <a:prstGeom prst="ellipse">
-            <a:avLst/>
-          </a:prstGeom>
-          <a:solidFill>
-            <a:srgbClr val="8C56B3"/>
-          </a:solidFill>
-          <a:ln>
-            <a:noFill/>
-          </a:ln>
-        </p:spPr>
-        <p:txBody>
-          <a:bodyPr rtlCol="0" anchor="ctr"/>
-          <a:lstStyle/>
-          <a:p>
-            <a:pPr algn="ctr"/>
-          </a:p>
-        </p:txBody>
-      </p:sp>
-      <p:sp>
-        <p:nvSpPr>
-          <p:cNvPr id="15" name="장식"/>
-          <p:cNvSpPr/>
-          <p:nvPr/>
-        </p:nvSpPr>
-        <p:spPr>
-          <a:xfrm>
-            <a:off x="11602587" y="1201606"/>
-            <a:ext cx="84341" cy="84341"/>
-          </a:xfrm>
-          <a:prstGeom prst="ellipse">
-            <a:avLst/>
-          </a:prstGeom>
-          <a:solidFill>
-            <a:srgbClr val="E3D3EE"/>
-          </a:solidFill>
-          <a:ln>
-            <a:noFill/>
-          </a:ln>
-        </p:spPr>
-        <p:txBody>
-          <a:bodyPr rtlCol="0" anchor="ctr"/>
-          <a:lstStyle/>
-          <a:p>
-            <a:pPr algn="ctr"/>
-          </a:p>
-        </p:txBody>
-      </p:sp>
-      <p:sp>
-        <p:nvSpPr>
           <p:cNvPr id="2" name="Title 1"/>
           <p:cNvSpPr>
             <a:spLocks noGrp="1"/>
@@ -6030,7 +4712,7 @@
       </p:sp>
       <p:sp>
         <p:nvSpPr>
-          <p:cNvPr id="16" name="줄 1"/>
+          <p:cNvPr id="5" name="줄 1"/>
           <p:cNvSpPr/>
           <p:nvPr/>
         </p:nvSpPr>
@@ -6063,7 +4745,7 @@
       </p:sp>
       <p:sp>
         <p:nvSpPr>
-          <p:cNvPr id="17" name="번호 1"/>
+          <p:cNvPr id="6" name="번호 1"/>
           <p:cNvSpPr/>
           <p:nvPr/>
         </p:nvSpPr>
@@ -6106,7 +4788,7 @@
       </p:sp>
       <p:sp>
         <p:nvSpPr>
-          <p:cNvPr id="18" name="TextBox 17"/>
+          <p:cNvPr id="7" name="TextBox 6"/>
           <p:cNvSpPr txBox="1"/>
           <p:nvPr/>
         </p:nvSpPr>
@@ -6144,7 +4826,7 @@
       </p:sp>
       <p:sp>
         <p:nvSpPr>
-          <p:cNvPr id="19" name="TextBox 18"/>
+          <p:cNvPr id="8" name="TextBox 7"/>
           <p:cNvSpPr txBox="1"/>
           <p:nvPr/>
         </p:nvSpPr>
@@ -6182,7 +4864,7 @@
       </p:sp>
       <p:sp>
         <p:nvSpPr>
-          <p:cNvPr id="20" name="줄 2"/>
+          <p:cNvPr id="9" name="줄 2"/>
           <p:cNvSpPr/>
           <p:nvPr/>
         </p:nvSpPr>
@@ -6215,7 +4897,7 @@
       </p:sp>
       <p:sp>
         <p:nvSpPr>
-          <p:cNvPr id="21" name="번호 2"/>
+          <p:cNvPr id="10" name="번호 2"/>
           <p:cNvSpPr/>
           <p:nvPr/>
         </p:nvSpPr>
@@ -6258,7 +4940,7 @@
       </p:sp>
       <p:sp>
         <p:nvSpPr>
-          <p:cNvPr id="22" name="TextBox 21"/>
+          <p:cNvPr id="11" name="TextBox 10"/>
           <p:cNvSpPr txBox="1"/>
           <p:nvPr/>
         </p:nvSpPr>
@@ -6296,7 +4978,7 @@
       </p:sp>
       <p:sp>
         <p:nvSpPr>
-          <p:cNvPr id="23" name="TextBox 22"/>
+          <p:cNvPr id="12" name="TextBox 11"/>
           <p:cNvSpPr txBox="1"/>
           <p:nvPr/>
         </p:nvSpPr>
@@ -6334,7 +5016,7 @@
       </p:sp>
       <p:sp>
         <p:nvSpPr>
-          <p:cNvPr id="24" name="줄 3"/>
+          <p:cNvPr id="13" name="줄 3"/>
           <p:cNvSpPr/>
           <p:nvPr/>
         </p:nvSpPr>
@@ -6367,7 +5049,7 @@
       </p:sp>
       <p:sp>
         <p:nvSpPr>
-          <p:cNvPr id="25" name="번호 3"/>
+          <p:cNvPr id="14" name="번호 3"/>
           <p:cNvSpPr/>
           <p:nvPr/>
         </p:nvSpPr>
@@ -6410,7 +5092,7 @@
       </p:sp>
       <p:sp>
         <p:nvSpPr>
-          <p:cNvPr id="26" name="TextBox 25"/>
+          <p:cNvPr id="15" name="TextBox 14"/>
           <p:cNvSpPr txBox="1"/>
           <p:nvPr/>
         </p:nvSpPr>
@@ -6448,7 +5130,7 @@
       </p:sp>
       <p:sp>
         <p:nvSpPr>
-          <p:cNvPr id="27" name="TextBox 26"/>
+          <p:cNvPr id="16" name="TextBox 15"/>
           <p:cNvSpPr txBox="1"/>
           <p:nvPr/>
         </p:nvSpPr>
@@ -6570,325 +5252,6 @@
       </p:sp>
       <p:sp>
         <p:nvSpPr>
-          <p:cNvPr id="5" name="장식"/>
-          <p:cNvSpPr/>
-          <p:nvPr/>
-        </p:nvSpPr>
-        <p:spPr>
-          <a:xfrm>
-            <a:off x="10902130" y="434860"/>
-            <a:ext cx="153549" cy="153549"/>
-          </a:xfrm>
-          <a:prstGeom prst="ellipse">
-            <a:avLst/>
-          </a:prstGeom>
-          <a:solidFill>
-            <a:srgbClr val="8C56B3"/>
-          </a:solidFill>
-          <a:ln>
-            <a:noFill/>
-          </a:ln>
-        </p:spPr>
-        <p:txBody>
-          <a:bodyPr rtlCol="0" anchor="ctr"/>
-          <a:lstStyle/>
-          <a:p>
-            <a:pPr algn="ctr"/>
-          </a:p>
-        </p:txBody>
-      </p:sp>
-      <p:sp>
-        <p:nvSpPr>
-          <p:cNvPr id="6" name="장식"/>
-          <p:cNvSpPr/>
-          <p:nvPr/>
-        </p:nvSpPr>
-        <p:spPr>
-          <a:xfrm>
-            <a:off x="11363808" y="1127246"/>
-            <a:ext cx="113682" cy="113682"/>
-          </a:xfrm>
-          <a:prstGeom prst="ellipse">
-            <a:avLst/>
-          </a:prstGeom>
-          <a:solidFill>
-            <a:srgbClr val="E3D3EE"/>
-          </a:solidFill>
-          <a:ln>
-            <a:noFill/>
-          </a:ln>
-        </p:spPr>
-        <p:txBody>
-          <a:bodyPr rtlCol="0" anchor="ctr"/>
-          <a:lstStyle/>
-          <a:p>
-            <a:pPr algn="ctr"/>
-          </a:p>
-        </p:txBody>
-      </p:sp>
-      <p:sp>
-        <p:nvSpPr>
-          <p:cNvPr id="7" name="장식"/>
-          <p:cNvSpPr/>
-          <p:nvPr/>
-        </p:nvSpPr>
-        <p:spPr>
-          <a:xfrm>
-            <a:off x="11568698" y="497270"/>
-            <a:ext cx="149756" cy="149756"/>
-          </a:xfrm>
-          <a:prstGeom prst="ellipse">
-            <a:avLst/>
-          </a:prstGeom>
-          <a:solidFill>
-            <a:srgbClr val="868D3F"/>
-          </a:solidFill>
-          <a:ln>
-            <a:noFill/>
-          </a:ln>
-        </p:spPr>
-        <p:txBody>
-          <a:bodyPr rtlCol="0" anchor="ctr"/>
-          <a:lstStyle/>
-          <a:p>
-            <a:pPr algn="ctr"/>
-          </a:p>
-        </p:txBody>
-      </p:sp>
-      <p:sp>
-        <p:nvSpPr>
-          <p:cNvPr id="8" name="장식"/>
-          <p:cNvSpPr/>
-          <p:nvPr/>
-        </p:nvSpPr>
-        <p:spPr>
-          <a:xfrm>
-            <a:off x="11523643" y="1096027"/>
-            <a:ext cx="134066" cy="134066"/>
-          </a:xfrm>
-          <a:prstGeom prst="ellipse">
-            <a:avLst/>
-          </a:prstGeom>
-          <a:solidFill>
-            <a:srgbClr val="8C56B3"/>
-          </a:solidFill>
-          <a:ln>
-            <a:noFill/>
-          </a:ln>
-        </p:spPr>
-        <p:txBody>
-          <a:bodyPr rtlCol="0" anchor="ctr"/>
-          <a:lstStyle/>
-          <a:p>
-            <a:pPr algn="ctr"/>
-          </a:p>
-        </p:txBody>
-      </p:sp>
-      <p:sp>
-        <p:nvSpPr>
-          <p:cNvPr id="9" name="장식"/>
-          <p:cNvSpPr/>
-          <p:nvPr/>
-        </p:nvSpPr>
-        <p:spPr>
-          <a:xfrm>
-            <a:off x="11054778" y="332121"/>
-            <a:ext cx="94724" cy="94724"/>
-          </a:xfrm>
-          <a:prstGeom prst="ellipse">
-            <a:avLst/>
-          </a:prstGeom>
-          <a:solidFill>
-            <a:srgbClr val="E3D3EE"/>
-          </a:solidFill>
-          <a:ln>
-            <a:noFill/>
-          </a:ln>
-        </p:spPr>
-        <p:txBody>
-          <a:bodyPr rtlCol="0" anchor="ctr"/>
-          <a:lstStyle/>
-          <a:p>
-            <a:pPr algn="ctr"/>
-          </a:p>
-        </p:txBody>
-      </p:sp>
-      <p:sp>
-        <p:nvSpPr>
-          <p:cNvPr id="10" name="장식"/>
-          <p:cNvSpPr/>
-          <p:nvPr/>
-        </p:nvSpPr>
-        <p:spPr>
-          <a:xfrm>
-            <a:off x="11428224" y="351933"/>
-            <a:ext cx="102698" cy="102698"/>
-          </a:xfrm>
-          <a:prstGeom prst="ellipse">
-            <a:avLst/>
-          </a:prstGeom>
-          <a:solidFill>
-            <a:srgbClr val="868D3F"/>
-          </a:solidFill>
-          <a:ln>
-            <a:noFill/>
-          </a:ln>
-        </p:spPr>
-        <p:txBody>
-          <a:bodyPr rtlCol="0" anchor="ctr"/>
-          <a:lstStyle/>
-          <a:p>
-            <a:pPr algn="ctr"/>
-          </a:p>
-        </p:txBody>
-      </p:sp>
-      <p:sp>
-        <p:nvSpPr>
-          <p:cNvPr id="11" name="장식"/>
-          <p:cNvSpPr/>
-          <p:nvPr/>
-        </p:nvSpPr>
-        <p:spPr>
-          <a:xfrm>
-            <a:off x="11597449" y="1195815"/>
-            <a:ext cx="177042" cy="177042"/>
-          </a:xfrm>
-          <a:prstGeom prst="ellipse">
-            <a:avLst/>
-          </a:prstGeom>
-          <a:solidFill>
-            <a:srgbClr val="8C56B3"/>
-          </a:solidFill>
-          <a:ln>
-            <a:noFill/>
-          </a:ln>
-        </p:spPr>
-        <p:txBody>
-          <a:bodyPr rtlCol="0" anchor="ctr"/>
-          <a:lstStyle/>
-          <a:p>
-            <a:pPr algn="ctr"/>
-          </a:p>
-        </p:txBody>
-      </p:sp>
-      <p:sp>
-        <p:nvSpPr>
-          <p:cNvPr id="12" name="장식"/>
-          <p:cNvSpPr/>
-          <p:nvPr/>
-        </p:nvSpPr>
-        <p:spPr>
-          <a:xfrm>
-            <a:off x="11309508" y="479409"/>
-            <a:ext cx="170008" cy="170008"/>
-          </a:xfrm>
-          <a:prstGeom prst="ellipse">
-            <a:avLst/>
-          </a:prstGeom>
-          <a:solidFill>
-            <a:srgbClr val="E3D3EE"/>
-          </a:solidFill>
-          <a:ln>
-            <a:noFill/>
-          </a:ln>
-        </p:spPr>
-        <p:txBody>
-          <a:bodyPr rtlCol="0" anchor="ctr"/>
-          <a:lstStyle/>
-          <a:p>
-            <a:pPr algn="ctr"/>
-          </a:p>
-        </p:txBody>
-      </p:sp>
-      <p:sp>
-        <p:nvSpPr>
-          <p:cNvPr id="13" name="장식"/>
-          <p:cNvSpPr/>
-          <p:nvPr/>
-        </p:nvSpPr>
-        <p:spPr>
-          <a:xfrm>
-            <a:off x="11092695" y="457650"/>
-            <a:ext cx="173296" cy="173296"/>
-          </a:xfrm>
-          <a:prstGeom prst="ellipse">
-            <a:avLst/>
-          </a:prstGeom>
-          <a:solidFill>
-            <a:srgbClr val="868D3F"/>
-          </a:solidFill>
-          <a:ln>
-            <a:noFill/>
-          </a:ln>
-        </p:spPr>
-        <p:txBody>
-          <a:bodyPr rtlCol="0" anchor="ctr"/>
-          <a:lstStyle/>
-          <a:p>
-            <a:pPr algn="ctr"/>
-          </a:p>
-        </p:txBody>
-      </p:sp>
-      <p:sp>
-        <p:nvSpPr>
-          <p:cNvPr id="14" name="장식"/>
-          <p:cNvSpPr/>
-          <p:nvPr/>
-        </p:nvSpPr>
-        <p:spPr>
-          <a:xfrm>
-            <a:off x="10802743" y="209851"/>
-            <a:ext cx="141496" cy="141496"/>
-          </a:xfrm>
-          <a:prstGeom prst="ellipse">
-            <a:avLst/>
-          </a:prstGeom>
-          <a:solidFill>
-            <a:srgbClr val="8C56B3"/>
-          </a:solidFill>
-          <a:ln>
-            <a:noFill/>
-          </a:ln>
-        </p:spPr>
-        <p:txBody>
-          <a:bodyPr rtlCol="0" anchor="ctr"/>
-          <a:lstStyle/>
-          <a:p>
-            <a:pPr algn="ctr"/>
-          </a:p>
-        </p:txBody>
-      </p:sp>
-      <p:sp>
-        <p:nvSpPr>
-          <p:cNvPr id="15" name="장식"/>
-          <p:cNvSpPr/>
-          <p:nvPr/>
-        </p:nvSpPr>
-        <p:spPr>
-          <a:xfrm>
-            <a:off x="11602587" y="1201606"/>
-            <a:ext cx="84341" cy="84341"/>
-          </a:xfrm>
-          <a:prstGeom prst="ellipse">
-            <a:avLst/>
-          </a:prstGeom>
-          <a:solidFill>
-            <a:srgbClr val="E3D3EE"/>
-          </a:solidFill>
-          <a:ln>
-            <a:noFill/>
-          </a:ln>
-        </p:spPr>
-        <p:txBody>
-          <a:bodyPr rtlCol="0" anchor="ctr"/>
-          <a:lstStyle/>
-          <a:p>
-            <a:pPr algn="ctr"/>
-          </a:p>
-        </p:txBody>
-      </p:sp>
-      <p:sp>
-        <p:nvSpPr>
           <p:cNvPr id="2" name="Title 1"/>
           <p:cNvSpPr>
             <a:spLocks noGrp="1"/>
@@ -6927,7 +5290,7 @@
       </p:sp>
       <p:sp>
         <p:nvSpPr>
-          <p:cNvPr id="16" name="사진 자리"/>
+          <p:cNvPr id="5" name="사진 자리"/>
           <p:cNvSpPr/>
           <p:nvPr/>
         </p:nvSpPr>
@@ -6975,7 +5338,7 @@
       </p:sp>
       <p:sp>
         <p:nvSpPr>
-          <p:cNvPr id="17" name="사진 자리"/>
+          <p:cNvPr id="6" name="사진 자리"/>
           <p:cNvSpPr/>
           <p:nvPr/>
         </p:nvSpPr>
@@ -7023,7 +5386,7 @@
       </p:sp>
       <p:sp>
         <p:nvSpPr>
-          <p:cNvPr id="18" name="사진 자리"/>
+          <p:cNvPr id="7" name="사진 자리"/>
           <p:cNvSpPr/>
           <p:nvPr/>
         </p:nvSpPr>
@@ -7071,7 +5434,7 @@
       </p:sp>
       <p:sp>
         <p:nvSpPr>
-          <p:cNvPr id="19" name="사진 자리"/>
+          <p:cNvPr id="8" name="사진 자리"/>
           <p:cNvSpPr/>
           <p:nvPr/>
         </p:nvSpPr>
@@ -7119,7 +5482,7 @@
       </p:sp>
       <p:sp>
         <p:nvSpPr>
-          <p:cNvPr id="20" name="사진 자리"/>
+          <p:cNvPr id="9" name="사진 자리"/>
           <p:cNvSpPr/>
           <p:nvPr/>
         </p:nvSpPr>
@@ -7167,7 +5530,7 @@
       </p:sp>
       <p:sp>
         <p:nvSpPr>
-          <p:cNvPr id="21" name="사진 자리"/>
+          <p:cNvPr id="10" name="사진 자리"/>
           <p:cNvSpPr/>
           <p:nvPr/>
         </p:nvSpPr>
@@ -7224,14 +5587,6 @@
 <file path=ppt/slides/slide6.xml><?xml version="1.0" encoding="utf-8"?>
 <p:sld xmlns:a="http://schemas.openxmlformats.org/drawingml/2006/main" xmlns:p="http://schemas.openxmlformats.org/presentationml/2006/main" xmlns:r="http://schemas.openxmlformats.org/officeDocument/2006/relationships">
   <p:cSld>
-    <p:bg>
-      <p:bgPr>
-        <a:solidFill>
-          <a:srgbClr val="FFFFFF"/>
-        </a:solidFill>
-        <a:effectLst/>
-      </p:bgPr>
-    </p:bg>
     <p:spTree>
       <p:nvGrpSpPr>
         <p:cNvPr id="1" name=""/>
@@ -7239,383 +5594,30 @@
         <p:nvPr/>
       </p:nvGrpSpPr>
       <p:grpSpPr/>
-      <p:sp>
-        <p:nvSpPr>
-          <p:cNvPr id="3" name="장식"/>
-          <p:cNvSpPr/>
+      <p:pic>
+        <p:nvPicPr>
+          <p:cNvPr id="3" name="표지 그림" descr="family-11.jpg"/>
+          <p:cNvPicPr>
+            <a:picLocks noChangeAspect="1"/>
+          </p:cNvPicPr>
           <p:nvPr/>
-        </p:nvSpPr>
-        <p:spPr>
-          <a:xfrm>
-            <a:off x="7071183" y="-1714500"/>
-            <a:ext cx="7886700" cy="7886700"/>
-          </a:xfrm>
-          <a:prstGeom prst="ellipse">
+        </p:nvPicPr>
+        <p:blipFill>
+          <a:blip r:embed="rId2"/>
+          <a:stretch>
+            <a:fillRect/>
+          </a:stretch>
+        </p:blipFill>
+        <p:spPr>
+          <a:xfrm>
+            <a:off x="0" y="0"/>
+            <a:ext cx="12191695" cy="6858000"/>
+          </a:xfrm>
+          <a:prstGeom prst="rect">
             <a:avLst/>
           </a:prstGeom>
-          <a:solidFill>
-            <a:srgbClr val="E3D3EE"/>
-          </a:solidFill>
-          <a:ln>
-            <a:noFill/>
-          </a:ln>
-        </p:spPr>
-        <p:txBody>
-          <a:bodyPr rtlCol="0" anchor="ctr"/>
-          <a:lstStyle/>
-          <a:p>
-            <a:pPr algn="ctr"/>
-          </a:p>
-        </p:txBody>
-      </p:sp>
-      <p:sp>
-        <p:nvSpPr>
-          <p:cNvPr id="4" name="장식"/>
-          <p:cNvSpPr/>
-          <p:nvPr/>
-        </p:nvSpPr>
-        <p:spPr>
-          <a:xfrm>
-            <a:off x="9509522" y="3977639"/>
-            <a:ext cx="3429000" cy="3429000"/>
-          </a:xfrm>
-          <a:prstGeom prst="ellipse">
-            <a:avLst/>
-          </a:prstGeom>
-          <a:solidFill>
-            <a:srgbClr val="8C56B3"/>
-          </a:solidFill>
-          <a:ln>
-            <a:noFill/>
-          </a:ln>
-        </p:spPr>
-        <p:txBody>
-          <a:bodyPr rtlCol="0" anchor="ctr"/>
-          <a:lstStyle/>
-          <a:p>
-            <a:pPr algn="ctr"/>
-          </a:p>
-        </p:txBody>
-      </p:sp>
-      <p:sp>
-        <p:nvSpPr>
-          <p:cNvPr id="5" name="장식"/>
-          <p:cNvSpPr/>
-          <p:nvPr/>
-        </p:nvSpPr>
-        <p:spPr>
-          <a:xfrm>
-            <a:off x="8548094" y="665468"/>
-            <a:ext cx="439711" cy="439711"/>
-          </a:xfrm>
-          <a:prstGeom prst="ellipse">
-            <a:avLst/>
-          </a:prstGeom>
-          <a:solidFill>
-            <a:srgbClr val="8C56B3"/>
-          </a:solidFill>
-          <a:ln>
-            <a:noFill/>
-          </a:ln>
-        </p:spPr>
-        <p:txBody>
-          <a:bodyPr rtlCol="0" anchor="ctr"/>
-          <a:lstStyle/>
-          <a:p>
-            <a:pPr algn="ctr"/>
-          </a:p>
-        </p:txBody>
-      </p:sp>
-      <p:sp>
-        <p:nvSpPr>
-          <p:cNvPr id="6" name="장식"/>
-          <p:cNvSpPr/>
-          <p:nvPr/>
-        </p:nvSpPr>
-        <p:spPr>
-          <a:xfrm>
-            <a:off x="9870174" y="2648211"/>
-            <a:ext cx="325546" cy="325546"/>
-          </a:xfrm>
-          <a:prstGeom prst="ellipse">
-            <a:avLst/>
-          </a:prstGeom>
-          <a:solidFill>
-            <a:srgbClr val="E3D3EE"/>
-          </a:solidFill>
-          <a:ln>
-            <a:noFill/>
-          </a:ln>
-        </p:spPr>
-        <p:txBody>
-          <a:bodyPr rtlCol="0" anchor="ctr"/>
-          <a:lstStyle/>
-          <a:p>
-            <a:pPr algn="ctr"/>
-          </a:p>
-        </p:txBody>
-      </p:sp>
-      <p:sp>
-        <p:nvSpPr>
-          <p:cNvPr id="7" name="장식"/>
-          <p:cNvSpPr/>
-          <p:nvPr/>
-        </p:nvSpPr>
-        <p:spPr>
-          <a:xfrm>
-            <a:off x="10456902" y="844189"/>
-            <a:ext cx="428847" cy="428847"/>
-          </a:xfrm>
-          <a:prstGeom prst="ellipse">
-            <a:avLst/>
-          </a:prstGeom>
-          <a:solidFill>
-            <a:srgbClr val="868D3F"/>
-          </a:solidFill>
-          <a:ln>
-            <a:noFill/>
-          </a:ln>
-        </p:spPr>
-        <p:txBody>
-          <a:bodyPr rtlCol="0" anchor="ctr"/>
-          <a:lstStyle/>
-          <a:p>
-            <a:pPr algn="ctr"/>
-          </a:p>
-        </p:txBody>
-      </p:sp>
-      <p:sp>
-        <p:nvSpPr>
-          <p:cNvPr id="8" name="장식"/>
-          <p:cNvSpPr/>
-          <p:nvPr/>
-        </p:nvSpPr>
-        <p:spPr>
-          <a:xfrm>
-            <a:off x="10327883" y="2558810"/>
-            <a:ext cx="383917" cy="383917"/>
-          </a:xfrm>
-          <a:prstGeom prst="ellipse">
-            <a:avLst/>
-          </a:prstGeom>
-          <a:solidFill>
-            <a:srgbClr val="8C56B3"/>
-          </a:solidFill>
-          <a:ln>
-            <a:noFill/>
-          </a:ln>
-        </p:spPr>
-        <p:txBody>
-          <a:bodyPr rtlCol="0" anchor="ctr"/>
-          <a:lstStyle/>
-          <a:p>
-            <a:pPr algn="ctr"/>
-          </a:p>
-        </p:txBody>
-      </p:sp>
-      <p:sp>
-        <p:nvSpPr>
-          <p:cNvPr id="9" name="장식"/>
-          <p:cNvSpPr/>
-          <p:nvPr/>
-        </p:nvSpPr>
-        <p:spPr>
-          <a:xfrm>
-            <a:off x="8985224" y="371263"/>
-            <a:ext cx="271256" cy="271256"/>
-          </a:xfrm>
-          <a:prstGeom prst="ellipse">
-            <a:avLst/>
-          </a:prstGeom>
-          <a:solidFill>
-            <a:srgbClr val="E3D3EE"/>
-          </a:solidFill>
-          <a:ln>
-            <a:noFill/>
-          </a:ln>
-        </p:spPr>
-        <p:txBody>
-          <a:bodyPr rtlCol="0" anchor="ctr"/>
-          <a:lstStyle/>
-          <a:p>
-            <a:pPr algn="ctr"/>
-          </a:p>
-        </p:txBody>
-      </p:sp>
-      <p:sp>
-        <p:nvSpPr>
-          <p:cNvPr id="10" name="장식"/>
-          <p:cNvSpPr/>
-          <p:nvPr/>
-        </p:nvSpPr>
-        <p:spPr>
-          <a:xfrm>
-            <a:off x="10054636" y="427995"/>
-            <a:ext cx="294091" cy="294091"/>
-          </a:xfrm>
-          <a:prstGeom prst="ellipse">
-            <a:avLst/>
-          </a:prstGeom>
-          <a:solidFill>
-            <a:srgbClr val="868D3F"/>
-          </a:solidFill>
-          <a:ln>
-            <a:noFill/>
-          </a:ln>
-        </p:spPr>
-        <p:txBody>
-          <a:bodyPr rtlCol="0" anchor="ctr"/>
-          <a:lstStyle/>
-          <a:p>
-            <a:pPr algn="ctr"/>
-          </a:p>
-        </p:txBody>
-      </p:sp>
-      <p:sp>
-        <p:nvSpPr>
-          <p:cNvPr id="11" name="장식"/>
-          <p:cNvSpPr/>
-          <p:nvPr/>
-        </p:nvSpPr>
-        <p:spPr>
-          <a:xfrm>
-            <a:off x="10539235" y="2844566"/>
-            <a:ext cx="506986" cy="506986"/>
-          </a:xfrm>
-          <a:prstGeom prst="ellipse">
-            <a:avLst/>
-          </a:prstGeom>
-          <a:solidFill>
-            <a:srgbClr val="8C56B3"/>
-          </a:solidFill>
-          <a:ln>
-            <a:noFill/>
-          </a:ln>
-        </p:spPr>
-        <p:txBody>
-          <a:bodyPr rtlCol="0" anchor="ctr"/>
-          <a:lstStyle/>
-          <a:p>
-            <a:pPr algn="ctr"/>
-          </a:p>
-        </p:txBody>
-      </p:sp>
-      <p:sp>
-        <p:nvSpPr>
-          <p:cNvPr id="12" name="장식"/>
-          <p:cNvSpPr/>
-          <p:nvPr/>
-        </p:nvSpPr>
-        <p:spPr>
-          <a:xfrm>
-            <a:off x="9714677" y="793042"/>
-            <a:ext cx="486841" cy="486841"/>
-          </a:xfrm>
-          <a:prstGeom prst="ellipse">
-            <a:avLst/>
-          </a:prstGeom>
-          <a:solidFill>
-            <a:srgbClr val="E3D3EE"/>
-          </a:solidFill>
-          <a:ln>
-            <a:noFill/>
-          </a:ln>
-        </p:spPr>
-        <p:txBody>
-          <a:bodyPr rtlCol="0" anchor="ctr"/>
-          <a:lstStyle/>
-          <a:p>
-            <a:pPr algn="ctr"/>
-          </a:p>
-        </p:txBody>
-      </p:sp>
-      <p:sp>
-        <p:nvSpPr>
-          <p:cNvPr id="13" name="장식"/>
-          <p:cNvSpPr/>
-          <p:nvPr/>
-        </p:nvSpPr>
-        <p:spPr>
-          <a:xfrm>
-            <a:off x="9093804" y="730731"/>
-            <a:ext cx="496258" cy="496258"/>
-          </a:xfrm>
-          <a:prstGeom prst="ellipse">
-            <a:avLst/>
-          </a:prstGeom>
-          <a:solidFill>
-            <a:srgbClr val="868D3F"/>
-          </a:solidFill>
-          <a:ln>
-            <a:noFill/>
-          </a:ln>
-        </p:spPr>
-        <p:txBody>
-          <a:bodyPr rtlCol="0" anchor="ctr"/>
-          <a:lstStyle/>
-          <a:p>
-            <a:pPr algn="ctr"/>
-          </a:p>
-        </p:txBody>
-      </p:sp>
-      <p:sp>
-        <p:nvSpPr>
-          <p:cNvPr id="14" name="장식"/>
-          <p:cNvSpPr/>
-          <p:nvPr/>
-        </p:nvSpPr>
-        <p:spPr>
-          <a:xfrm>
-            <a:off x="8263488" y="21126"/>
-            <a:ext cx="405194" cy="405194"/>
-          </a:xfrm>
-          <a:prstGeom prst="ellipse">
-            <a:avLst/>
-          </a:prstGeom>
-          <a:solidFill>
-            <a:srgbClr val="8C56B3"/>
-          </a:solidFill>
-          <a:ln>
-            <a:noFill/>
-          </a:ln>
-        </p:spPr>
-        <p:txBody>
-          <a:bodyPr rtlCol="0" anchor="ctr"/>
-          <a:lstStyle/>
-          <a:p>
-            <a:pPr algn="ctr"/>
-          </a:p>
-        </p:txBody>
-      </p:sp>
-      <p:sp>
-        <p:nvSpPr>
-          <p:cNvPr id="15" name="장식"/>
-          <p:cNvSpPr/>
-          <p:nvPr/>
-        </p:nvSpPr>
-        <p:spPr>
-          <a:xfrm>
-            <a:off x="10553950" y="2861152"/>
-            <a:ext cx="241523" cy="241523"/>
-          </a:xfrm>
-          <a:prstGeom prst="ellipse">
-            <a:avLst/>
-          </a:prstGeom>
-          <a:solidFill>
-            <a:srgbClr val="E3D3EE"/>
-          </a:solidFill>
-          <a:ln>
-            <a:noFill/>
-          </a:ln>
-        </p:spPr>
-        <p:txBody>
-          <a:bodyPr rtlCol="0" anchor="ctr"/>
-          <a:lstStyle/>
-          <a:p>
-            <a:pPr algn="ctr"/>
-          </a:p>
-        </p:txBody>
-      </p:sp>
+        </p:spPr>
+      </p:pic>
       <p:sp>
         <p:nvSpPr>
           <p:cNvPr id="2" name="Title 1"/>
@@ -7629,7 +5631,7 @@
         <p:spPr>
           <a:xfrm>
             <a:off x="853418" y="2057400"/>
-            <a:ext cx="6705432" cy="1463040"/>
+            <a:ext cx="6095847" cy="1554480"/>
           </a:xfrm>
         </p:spPr>
         <p:txBody>
@@ -7649,20 +5651,20 @@
                   <a:srgbClr val="573371"/>
                 </a:solidFill>
               </a:rPr>
-              <a:t>우리 가족을 소개했어요</a:t>
-            </a:r>
-          </a:p>
-        </p:txBody>
-      </p:sp>
-      <p:sp>
-        <p:nvSpPr>
-          <p:cNvPr id="16" name="한 줄 문구"/>
+              <a:t>우리 가족 소개를 마칩니다</a:t>
+            </a:r>
+          </a:p>
+        </p:txBody>
+      </p:sp>
+      <p:sp>
+        <p:nvSpPr>
+          <p:cNvPr id="4" name="한 줄 문구"/>
           <p:cNvSpPr txBox="1"/>
           <p:nvPr/>
         </p:nvSpPr>
         <p:spPr>
           <a:xfrm>
-            <a:off x="853418" y="3611880"/>
+            <a:off x="853418" y="3749039"/>
             <a:ext cx="6095847" cy="822960"/>
           </a:xfrm>
           <a:prstGeom prst="rect">
@@ -7687,20 +5689,20 @@
                   <a:srgbClr val="573371"/>
                 </a:solidFill>
               </a:rPr>
-              <a:t>함께여서 늘 든든합니다</a:t>
-            </a:r>
-          </a:p>
-        </p:txBody>
-      </p:sp>
-      <p:sp>
-        <p:nvSpPr>
-          <p:cNvPr id="17" name="안내 문구"/>
+              <a:t>읽어 주셔서 고맙습니다</a:t>
+            </a:r>
+          </a:p>
+        </p:txBody>
+      </p:sp>
+      <p:sp>
+        <p:nvSpPr>
+          <p:cNvPr id="5" name="안내 문구"/>
           <p:cNvSpPr txBox="1"/>
           <p:nvPr/>
         </p:nvSpPr>
         <p:spPr>
           <a:xfrm>
-            <a:off x="853418" y="4480560"/>
+            <a:off x="853418" y="4617720"/>
             <a:ext cx="6095847" cy="914400"/>
           </a:xfrm>
           <a:prstGeom prst="rect">

--- a/public/fun/pack/pptx/family/가족소개_11_우리부부_라일락골목.pptx
+++ b/public/fun/pack/pptx/family/가족소개_11_우리부부_라일락골목.pptx
@@ -3347,7 +3347,7 @@
             <a:r>
               <a:rPr sz="3600" b="1" i="0">
                 <a:solidFill>
-                  <a:srgbClr val="573371"/>
+                  <a:srgbClr val="4E226D"/>
                 </a:solidFill>
               </a:rPr>
               <a:t>우리 가족을 소개합니다</a:t>
@@ -3385,7 +3385,7 @@
             <a:r>
               <a:rPr sz="1700" b="0" i="1">
                 <a:solidFill>
-                  <a:srgbClr val="573371"/>
+                  <a:srgbClr val="4E226D"/>
                 </a:solidFill>
               </a:rPr>
               <a:t>라일락 골목을 걷다 멈춘 저녁</a:t>
@@ -3472,7 +3472,7 @@
             <a:avLst/>
           </a:prstGeom>
           <a:solidFill>
-            <a:srgbClr val="E3D3EE"/>
+            <a:srgbClr val="E8D4F7"/>
           </a:solidFill>
           <a:ln>
             <a:noFill/>
@@ -3501,7 +3501,7 @@
             <a:avLst/>
           </a:prstGeom>
           <a:solidFill>
-            <a:srgbClr val="8C56B3"/>
+            <a:srgbClr val="9651C8"/>
           </a:solidFill>
           <a:ln>
             <a:noFill/>
@@ -3545,7 +3545,7 @@
             <a:r>
               <a:rPr sz="3000" b="1" i="0">
                 <a:solidFill>
-                  <a:srgbClr val="573371"/>
+                  <a:srgbClr val="4E226D"/>
                 </a:solidFill>
               </a:rPr>
               <a:t>가족 구성원</a:t>
@@ -3568,11 +3568,11 @@
             <a:avLst/>
           </a:prstGeom>
           <a:solidFill>
-            <a:srgbClr val="E3D3EE"/>
+            <a:srgbClr val="E8D4F7"/>
           </a:solidFill>
           <a:ln w="19050">
             <a:solidFill>
-              <a:srgbClr val="8C56B3"/>
+              <a:srgbClr val="9651C8"/>
             </a:solidFill>
             <a:prstDash val="dash"/>
           </a:ln>
@@ -3591,7 +3591,7 @@
             <a:r>
               <a:rPr sz="1200" b="0" i="0">
                 <a:solidFill>
-                  <a:srgbClr val="573371"/>
+                  <a:srgbClr val="4E226D"/>
                 </a:solidFill>
               </a:rPr>
               <a:t>사진</a:t>
@@ -3629,7 +3629,7 @@
             <a:r>
               <a:rPr sz="1600" b="1" i="0">
                 <a:solidFill>
-                  <a:srgbClr val="573371"/>
+                  <a:srgbClr val="4E226D"/>
                 </a:solidFill>
               </a:rPr>
               <a:t>남편</a:t>
@@ -3720,11 +3720,11 @@
             <a:avLst/>
           </a:prstGeom>
           <a:solidFill>
-            <a:srgbClr val="E3D3EE"/>
+            <a:srgbClr val="E8D4F7"/>
           </a:solidFill>
           <a:ln w="19050">
             <a:solidFill>
-              <a:srgbClr val="8C56B3"/>
+              <a:srgbClr val="9651C8"/>
             </a:solidFill>
             <a:prstDash val="dash"/>
           </a:ln>
@@ -3743,7 +3743,7 @@
             <a:r>
               <a:rPr sz="1200" b="0" i="0">
                 <a:solidFill>
-                  <a:srgbClr val="573371"/>
+                  <a:srgbClr val="4E226D"/>
                 </a:solidFill>
               </a:rPr>
               <a:t>사진</a:t>
@@ -3781,7 +3781,7 @@
             <a:r>
               <a:rPr sz="1600" b="1" i="0">
                 <a:solidFill>
-                  <a:srgbClr val="573371"/>
+                  <a:srgbClr val="4E226D"/>
                 </a:solidFill>
               </a:rPr>
               <a:t>아내</a:t>
@@ -3898,7 +3898,7 @@
             <a:avLst/>
           </a:prstGeom>
           <a:solidFill>
-            <a:srgbClr val="E3D3EE"/>
+            <a:srgbClr val="E8D4F7"/>
           </a:solidFill>
           <a:ln>
             <a:noFill/>
@@ -3927,7 +3927,7 @@
             <a:avLst/>
           </a:prstGeom>
           <a:solidFill>
-            <a:srgbClr val="8C56B3"/>
+            <a:srgbClr val="9651C8"/>
           </a:solidFill>
           <a:ln>
             <a:noFill/>
@@ -3971,7 +3971,7 @@
             <a:r>
               <a:rPr sz="3000" b="1" i="0">
                 <a:solidFill>
-                  <a:srgbClr val="573371"/>
+                  <a:srgbClr val="4E226D"/>
                 </a:solidFill>
               </a:rPr>
               <a:t>우리 가족 이야기</a:t>
@@ -3994,7 +3994,7 @@
             <a:avLst/>
           </a:prstGeom>
           <a:solidFill>
-            <a:srgbClr val="E3D3EE"/>
+            <a:srgbClr val="E8D4F7"/>
           </a:solidFill>
           <a:ln>
             <a:noFill/>
@@ -4023,7 +4023,7 @@
             <a:avLst/>
           </a:prstGeom>
           <a:solidFill>
-            <a:srgbClr val="8C56B3"/>
+            <a:srgbClr val="9651C8"/>
           </a:solidFill>
           <a:ln w="38100">
             <a:solidFill>
@@ -4069,7 +4069,7 @@
             <a:r>
               <a:rPr sz="1600" b="1" i="0">
                 <a:solidFill>
-                  <a:srgbClr val="8C56B3"/>
+                  <a:srgbClr val="9651C8"/>
                 </a:solidFill>
               </a:rPr>
               <a:t>처음 만난 날</a:t>
@@ -4107,7 +4107,7 @@
             <a:r>
               <a:rPr sz="1800" b="1" i="0">
                 <a:solidFill>
-                  <a:srgbClr val="573371"/>
+                  <a:srgbClr val="4E226D"/>
                 </a:solidFill>
               </a:rPr>
               <a:t>첫 만남</a:t>
@@ -4168,7 +4168,7 @@
             <a:avLst/>
           </a:prstGeom>
           <a:solidFill>
-            <a:srgbClr val="8C56B3"/>
+            <a:srgbClr val="9651C8"/>
           </a:solidFill>
           <a:ln w="38100">
             <a:solidFill>
@@ -4214,7 +4214,7 @@
             <a:r>
               <a:rPr sz="1600" b="1" i="0">
                 <a:solidFill>
-                  <a:srgbClr val="8C56B3"/>
+                  <a:srgbClr val="9651C8"/>
                 </a:solidFill>
               </a:rPr>
               <a:t>결혼</a:t>
@@ -4252,7 +4252,7 @@
             <a:r>
               <a:rPr sz="1800" b="1" i="0">
                 <a:solidFill>
-                  <a:srgbClr val="573371"/>
+                  <a:srgbClr val="4E226D"/>
                 </a:solidFill>
               </a:rPr>
               <a:t>함께 시작한 날</a:t>
@@ -4313,7 +4313,7 @@
             <a:avLst/>
           </a:prstGeom>
           <a:solidFill>
-            <a:srgbClr val="8C56B3"/>
+            <a:srgbClr val="9651C8"/>
           </a:solidFill>
           <a:ln w="38100">
             <a:solidFill>
@@ -4359,7 +4359,7 @@
             <a:r>
               <a:rPr sz="1600" b="1" i="0">
                 <a:solidFill>
-                  <a:srgbClr val="8C56B3"/>
+                  <a:srgbClr val="9651C8"/>
                 </a:solidFill>
               </a:rPr>
               <a:t>첫 집</a:t>
@@ -4397,7 +4397,7 @@
             <a:r>
               <a:rPr sz="1800" b="1" i="0">
                 <a:solidFill>
-                  <a:srgbClr val="573371"/>
+                  <a:srgbClr val="4E226D"/>
                 </a:solidFill>
               </a:rPr>
               <a:t>우리의 보금자리</a:t>
@@ -4458,7 +4458,7 @@
             <a:avLst/>
           </a:prstGeom>
           <a:solidFill>
-            <a:srgbClr val="8C56B3"/>
+            <a:srgbClr val="9651C8"/>
           </a:solidFill>
           <a:ln w="38100">
             <a:solidFill>
@@ -4504,7 +4504,7 @@
             <a:r>
               <a:rPr sz="1600" b="1" i="0">
                 <a:solidFill>
-                  <a:srgbClr val="8C56B3"/>
+                  <a:srgbClr val="9651C8"/>
                 </a:solidFill>
               </a:rPr>
               <a:t>지금</a:t>
@@ -4542,7 +4542,7 @@
             <a:r>
               <a:rPr sz="1800" b="1" i="0">
                 <a:solidFill>
-                  <a:srgbClr val="573371"/>
+                  <a:srgbClr val="4E226D"/>
                 </a:solidFill>
               </a:rPr>
               <a:t>오늘의 우리</a:t>
@@ -4629,7 +4629,7 @@
             <a:avLst/>
           </a:prstGeom>
           <a:solidFill>
-            <a:srgbClr val="E3D3EE"/>
+            <a:srgbClr val="E8D4F7"/>
           </a:solidFill>
           <a:ln>
             <a:noFill/>
@@ -4658,7 +4658,7 @@
             <a:avLst/>
           </a:prstGeom>
           <a:solidFill>
-            <a:srgbClr val="8C56B3"/>
+            <a:srgbClr val="9651C8"/>
           </a:solidFill>
           <a:ln>
             <a:noFill/>
@@ -4702,7 +4702,7 @@
             <a:r>
               <a:rPr sz="3000" b="1" i="0">
                 <a:solidFill>
-                  <a:srgbClr val="573371"/>
+                  <a:srgbClr val="4E226D"/>
                 </a:solidFill>
               </a:rPr>
               <a:t>우리 가족의 약속</a:t>
@@ -4727,11 +4727,11 @@
             </a:avLst>
           </a:prstGeom>
           <a:solidFill>
-            <a:srgbClr val="F5F1F9"/>
+            <a:srgbClr val="F8F3FC"/>
           </a:solidFill>
           <a:ln w="12700">
             <a:solidFill>
-              <a:srgbClr val="E3D3EE"/>
+              <a:srgbClr val="E8D4F7"/>
             </a:solidFill>
           </a:ln>
         </p:spPr>
@@ -4758,7 +4758,7 @@
             <a:avLst/>
           </a:prstGeom>
           <a:solidFill>
-            <a:srgbClr val="8C56B3"/>
+            <a:srgbClr val="9651C8"/>
           </a:solidFill>
           <a:ln>
             <a:noFill/>
@@ -4816,7 +4816,7 @@
             <a:r>
               <a:rPr sz="1800" b="1" i="0">
                 <a:solidFill>
-                  <a:srgbClr val="573371"/>
+                  <a:srgbClr val="4E226D"/>
                 </a:solidFill>
               </a:rPr>
               <a:t>약속 1</a:t>
@@ -4879,11 +4879,11 @@
             </a:avLst>
           </a:prstGeom>
           <a:solidFill>
-            <a:srgbClr val="F5F1F9"/>
+            <a:srgbClr val="F8F3FC"/>
           </a:solidFill>
           <a:ln w="12700">
             <a:solidFill>
-              <a:srgbClr val="E3D3EE"/>
+              <a:srgbClr val="E8D4F7"/>
             </a:solidFill>
           </a:ln>
         </p:spPr>
@@ -4910,7 +4910,7 @@
             <a:avLst/>
           </a:prstGeom>
           <a:solidFill>
-            <a:srgbClr val="8C56B3"/>
+            <a:srgbClr val="9651C8"/>
           </a:solidFill>
           <a:ln>
             <a:noFill/>
@@ -4968,7 +4968,7 @@
             <a:r>
               <a:rPr sz="1800" b="1" i="0">
                 <a:solidFill>
-                  <a:srgbClr val="573371"/>
+                  <a:srgbClr val="4E226D"/>
                 </a:solidFill>
               </a:rPr>
               <a:t>약속 2</a:t>
@@ -5031,11 +5031,11 @@
             </a:avLst>
           </a:prstGeom>
           <a:solidFill>
-            <a:srgbClr val="F5F1F9"/>
+            <a:srgbClr val="F8F3FC"/>
           </a:solidFill>
           <a:ln w="12700">
             <a:solidFill>
-              <a:srgbClr val="E3D3EE"/>
+              <a:srgbClr val="E8D4F7"/>
             </a:solidFill>
           </a:ln>
         </p:spPr>
@@ -5062,7 +5062,7 @@
             <a:avLst/>
           </a:prstGeom>
           <a:solidFill>
-            <a:srgbClr val="8C56B3"/>
+            <a:srgbClr val="9651C8"/>
           </a:solidFill>
           <a:ln>
             <a:noFill/>
@@ -5120,7 +5120,7 @@
             <a:r>
               <a:rPr sz="1800" b="1" i="0">
                 <a:solidFill>
-                  <a:srgbClr val="573371"/>
+                  <a:srgbClr val="4E226D"/>
                 </a:solidFill>
               </a:rPr>
               <a:t>약속 3</a:t>
@@ -5207,7 +5207,7 @@
             <a:avLst/>
           </a:prstGeom>
           <a:solidFill>
-            <a:srgbClr val="E3D3EE"/>
+            <a:srgbClr val="E8D4F7"/>
           </a:solidFill>
           <a:ln>
             <a:noFill/>
@@ -5236,7 +5236,7 @@
             <a:avLst/>
           </a:prstGeom>
           <a:solidFill>
-            <a:srgbClr val="8C56B3"/>
+            <a:srgbClr val="9651C8"/>
           </a:solidFill>
           <a:ln>
             <a:noFill/>
@@ -5280,7 +5280,7 @@
             <a:r>
               <a:rPr sz="3000" b="1" i="0">
                 <a:solidFill>
-                  <a:srgbClr val="573371"/>
+                  <a:srgbClr val="4E226D"/>
                 </a:solidFill>
               </a:rPr>
               <a:t>가족 사진</a:t>
@@ -5305,11 +5305,11 @@
             </a:avLst>
           </a:prstGeom>
           <a:solidFill>
-            <a:srgbClr val="E3D3EE"/>
+            <a:srgbClr val="E8D4F7"/>
           </a:solidFill>
           <a:ln w="19050">
             <a:solidFill>
-              <a:srgbClr val="8C56B3"/>
+              <a:srgbClr val="9651C8"/>
             </a:solidFill>
             <a:prstDash val="dash"/>
           </a:ln>
@@ -5328,7 +5328,7 @@
             <a:r>
               <a:rPr sz="1200" b="0" i="0">
                 <a:solidFill>
-                  <a:srgbClr val="573371"/>
+                  <a:srgbClr val="4E226D"/>
                 </a:solidFill>
               </a:rPr>
               <a:t>사진 1</a:t>
@@ -5353,11 +5353,11 @@
             </a:avLst>
           </a:prstGeom>
           <a:solidFill>
-            <a:srgbClr val="E3D3EE"/>
+            <a:srgbClr val="E8D4F7"/>
           </a:solidFill>
           <a:ln w="19050">
             <a:solidFill>
-              <a:srgbClr val="8C56B3"/>
+              <a:srgbClr val="9651C8"/>
             </a:solidFill>
             <a:prstDash val="dash"/>
           </a:ln>
@@ -5376,7 +5376,7 @@
             <a:r>
               <a:rPr sz="1200" b="0" i="0">
                 <a:solidFill>
-                  <a:srgbClr val="573371"/>
+                  <a:srgbClr val="4E226D"/>
                 </a:solidFill>
               </a:rPr>
               <a:t>사진 2</a:t>
@@ -5401,11 +5401,11 @@
             </a:avLst>
           </a:prstGeom>
           <a:solidFill>
-            <a:srgbClr val="E3D3EE"/>
+            <a:srgbClr val="E8D4F7"/>
           </a:solidFill>
           <a:ln w="19050">
             <a:solidFill>
-              <a:srgbClr val="8C56B3"/>
+              <a:srgbClr val="9651C8"/>
             </a:solidFill>
             <a:prstDash val="dash"/>
           </a:ln>
@@ -5424,7 +5424,7 @@
             <a:r>
               <a:rPr sz="1200" b="0" i="0">
                 <a:solidFill>
-                  <a:srgbClr val="573371"/>
+                  <a:srgbClr val="4E226D"/>
                 </a:solidFill>
               </a:rPr>
               <a:t>사진 3</a:t>
@@ -5449,11 +5449,11 @@
             </a:avLst>
           </a:prstGeom>
           <a:solidFill>
-            <a:srgbClr val="E3D3EE"/>
+            <a:srgbClr val="E8D4F7"/>
           </a:solidFill>
           <a:ln w="19050">
             <a:solidFill>
-              <a:srgbClr val="8C56B3"/>
+              <a:srgbClr val="9651C8"/>
             </a:solidFill>
             <a:prstDash val="dash"/>
           </a:ln>
@@ -5472,7 +5472,7 @@
             <a:r>
               <a:rPr sz="1200" b="0" i="0">
                 <a:solidFill>
-                  <a:srgbClr val="573371"/>
+                  <a:srgbClr val="4E226D"/>
                 </a:solidFill>
               </a:rPr>
               <a:t>사진 4</a:t>
@@ -5497,11 +5497,11 @@
             </a:avLst>
           </a:prstGeom>
           <a:solidFill>
-            <a:srgbClr val="E3D3EE"/>
+            <a:srgbClr val="E8D4F7"/>
           </a:solidFill>
           <a:ln w="19050">
             <a:solidFill>
-              <a:srgbClr val="8C56B3"/>
+              <a:srgbClr val="9651C8"/>
             </a:solidFill>
             <a:prstDash val="dash"/>
           </a:ln>
@@ -5520,7 +5520,7 @@
             <a:r>
               <a:rPr sz="1200" b="0" i="0">
                 <a:solidFill>
-                  <a:srgbClr val="573371"/>
+                  <a:srgbClr val="4E226D"/>
                 </a:solidFill>
               </a:rPr>
               <a:t>사진 5</a:t>
@@ -5545,11 +5545,11 @@
             </a:avLst>
           </a:prstGeom>
           <a:solidFill>
-            <a:srgbClr val="E3D3EE"/>
+            <a:srgbClr val="E8D4F7"/>
           </a:solidFill>
           <a:ln w="19050">
             <a:solidFill>
-              <a:srgbClr val="8C56B3"/>
+              <a:srgbClr val="9651C8"/>
             </a:solidFill>
             <a:prstDash val="dash"/>
           </a:ln>
@@ -5568,7 +5568,7 @@
             <a:r>
               <a:rPr sz="1200" b="0" i="0">
                 <a:solidFill>
-                  <a:srgbClr val="573371"/>
+                  <a:srgbClr val="4E226D"/>
                 </a:solidFill>
               </a:rPr>
               <a:t>사진 6</a:t>
@@ -5648,7 +5648,7 @@
             <a:r>
               <a:rPr sz="3600" b="1" i="0">
                 <a:solidFill>
-                  <a:srgbClr val="573371"/>
+                  <a:srgbClr val="4E226D"/>
                 </a:solidFill>
               </a:rPr>
               <a:t>우리 가족 소개를 마칩니다</a:t>
@@ -5686,7 +5686,7 @@
             <a:r>
               <a:rPr sz="1700" b="0" i="1">
                 <a:solidFill>
-                  <a:srgbClr val="573371"/>
+                  <a:srgbClr val="4E226D"/>
                 </a:solidFill>
               </a:rPr>
               <a:t>읽어 주셔서 고맙습니다</a:t>
@@ -5751,34 +5751,34 @@
         <a:sysClr val="window" lastClr="FFFFFF"/>
       </a:lt1>
       <a:dk2>
-        <a:srgbClr val="573371"/>
+        <a:srgbClr val="4E226D"/>
       </a:dk2>
       <a:lt2>
-        <a:srgbClr val="F5F1F9"/>
+        <a:srgbClr val="F8F3FC"/>
       </a:lt2>
       <a:accent1>
-        <a:srgbClr val="8C56B3"/>
+        <a:srgbClr val="9651C8"/>
       </a:accent1>
       <a:accent2>
-        <a:srgbClr val="868D3F"/>
+        <a:srgbClr val="339941"/>
       </a:accent2>
       <a:accent3>
-        <a:srgbClr val="573371"/>
+        <a:srgbClr val="4E226D"/>
       </a:accent3>
       <a:accent4>
-        <a:srgbClr val="E3D3EE"/>
+        <a:srgbClr val="E8D4F7"/>
       </a:accent4>
       <a:accent5>
-        <a:srgbClr val="897279"/>
+        <a:srgbClr val="647584"/>
       </a:accent5>
       <a:accent6>
-        <a:srgbClr val="9A85AA"/>
+        <a:srgbClr val="957AA7"/>
       </a:accent6>
       <a:hlink>
-        <a:srgbClr val="8C56B3"/>
+        <a:srgbClr val="9651C8"/>
       </a:hlink>
       <a:folHlink>
-        <a:srgbClr val="573371"/>
+        <a:srgbClr val="4E226D"/>
       </a:folHlink>
     </a:clrScheme>
     <a:fontScheme name="Office">

--- a/public/fun/pack/pptx/family/가족소개_11_우리부부_라일락골목.pptx
+++ b/public/fun/pack/pptx/family/가족소개_11_우리부부_라일락골목.pptx
@@ -3286,6 +3286,14 @@
 <file path=ppt/slides/slide1.xml><?xml version="1.0" encoding="utf-8"?>
 <p:sld xmlns:a="http://schemas.openxmlformats.org/drawingml/2006/main" xmlns:p="http://schemas.openxmlformats.org/presentationml/2006/main" xmlns:r="http://schemas.openxmlformats.org/officeDocument/2006/relationships">
   <p:cSld>
+    <p:bg>
+      <p:bgPr>
+        <a:solidFill>
+          <a:srgbClr val="F5EAFD"/>
+        </a:solidFill>
+        <a:effectLst/>
+      </p:bgPr>
+    </p:bg>
     <p:spTree>
       <p:nvGrpSpPr>
         <p:cNvPr id="1" name=""/>
@@ -3293,30 +3301,116 @@
         <p:nvPr/>
       </p:nvGrpSpPr>
       <p:grpSpPr/>
-      <p:pic>
-        <p:nvPicPr>
-          <p:cNvPr id="3" name="표지 그림" descr="family-11.jpg"/>
-          <p:cNvPicPr>
-            <a:picLocks noChangeAspect="1"/>
-          </p:cNvPicPr>
-          <p:nvPr/>
-        </p:nvPicPr>
-        <p:blipFill>
-          <a:blip r:embed="rId2"/>
-          <a:stretch>
-            <a:fillRect/>
-          </a:stretch>
-        </p:blipFill>
+      <p:sp>
+        <p:nvSpPr>
+          <p:cNvPr id="3" name="사진 자리"/>
+          <p:cNvSpPr/>
+          <p:nvPr/>
+        </p:nvSpPr>
         <p:spPr>
           <a:xfrm>
             <a:off x="0" y="0"/>
-            <a:ext cx="12191695" cy="6858000"/>
+            <a:ext cx="4389010" cy="6858000"/>
           </a:xfrm>
           <a:prstGeom prst="rect">
             <a:avLst/>
           </a:prstGeom>
-        </p:spPr>
-      </p:pic>
+          <a:solidFill>
+            <a:srgbClr val="D2A6F2"/>
+          </a:solidFill>
+          <a:ln>
+            <a:noFill/>
+          </a:ln>
+        </p:spPr>
+        <p:txBody>
+          <a:bodyPr rtlCol="0" anchor="ctr" wrap="square" lIns="54864" rIns="54864" tIns="27432" bIns="27432">
+            <a:noAutofit/>
+          </a:bodyPr>
+          <a:lstStyle/>
+          <a:p>
+            <a:pPr algn="ctr">
+              <a:lnSpc>
+                <a:spcPct val="100000"/>
+              </a:lnSpc>
+            </a:pPr>
+            <a:r>
+              <a:rPr sz="1400" b="0" i="0">
+                <a:solidFill>
+                  <a:srgbClr val="3B2749"/>
+                </a:solidFill>
+              </a:rPr>
+              <a:t>사진을 넣어 주세요</a:t>
+            </a:r>
+          </a:p>
+        </p:txBody>
+      </p:sp>
+      <p:sp>
+        <p:nvSpPr>
+          <p:cNvPr id="4" name="장식"/>
+          <p:cNvSpPr/>
+          <p:nvPr/>
+        </p:nvSpPr>
+        <p:spPr>
+          <a:xfrm>
+            <a:off x="365750" y="365760"/>
+            <a:ext cx="3657508" cy="6126480"/>
+          </a:xfrm>
+          <a:prstGeom prst="rect">
+            <a:avLst/>
+          </a:prstGeom>
+          <a:noFill/>
+          <a:ln w="9525">
+            <a:solidFill>
+              <a:srgbClr val="26231F"/>
+            </a:solidFill>
+          </a:ln>
+        </p:spPr>
+        <p:txBody>
+          <a:bodyPr rtlCol="0" anchor="ctr"/>
+          <a:lstStyle/>
+          <a:p>
+            <a:pPr algn="ctr"/>
+          </a:p>
+        </p:txBody>
+      </p:sp>
+      <p:sp>
+        <p:nvSpPr>
+          <p:cNvPr id="5" name="라벨"/>
+          <p:cNvSpPr txBox="1"/>
+          <p:nvPr/>
+        </p:nvSpPr>
+        <p:spPr>
+          <a:xfrm>
+            <a:off x="6827349" y="2148840"/>
+            <a:ext cx="4632844" cy="274320"/>
+          </a:xfrm>
+          <a:prstGeom prst="rect">
+            <a:avLst/>
+          </a:prstGeom>
+          <a:noFill/>
+        </p:spPr>
+        <p:txBody>
+          <a:bodyPr wrap="square" lIns="54864" rIns="54864" tIns="27432" bIns="27432" anchor="t">
+            <a:noAutofit/>
+          </a:bodyPr>
+          <a:lstStyle/>
+          <a:p>
+            <a:pPr algn="l">
+              <a:lnSpc>
+                <a:spcPct val="115000"/>
+              </a:lnSpc>
+            </a:pPr>
+            <a:r>
+              <a:rPr sz="1000" b="1" i="0" spc="250">
+                <a:solidFill>
+                  <a:srgbClr val="26231F"/>
+                </a:solidFill>
+              </a:rPr>
+              <a:t>FAMILY ALBUM</a:t>
+            </a:r>
+          </a:p>
+        </p:txBody>
+      </p:sp>
       <p:sp>
         <p:nvSpPr>
           <p:cNvPr id="2" name="Title 1"/>
@@ -3329,8 +3423,8 @@
         </p:nvSpPr>
         <p:spPr>
           <a:xfrm>
-            <a:off x="853418" y="2057400"/>
-            <a:ext cx="6095847" cy="1554480"/>
+            <a:off x="6827349" y="2606040"/>
+            <a:ext cx="4632844" cy="1188720"/>
           </a:xfrm>
         </p:spPr>
         <p:txBody>
@@ -3345,9 +3439,9 @@
               </a:lnSpc>
             </a:pPr>
             <a:r>
-              <a:rPr sz="3600" b="1" i="0">
-                <a:solidFill>
-                  <a:srgbClr val="4E226D"/>
+              <a:rPr sz="4000" b="1" i="0">
+                <a:solidFill>
+                  <a:srgbClr val="26231F"/>
                 </a:solidFill>
               </a:rPr>
               <a:t>우리 가족을 소개합니다</a:t>
@@ -3357,14 +3451,14 @@
       </p:sp>
       <p:sp>
         <p:nvSpPr>
-          <p:cNvPr id="4" name="한 줄 문구"/>
+          <p:cNvPr id="6" name="한 줄 문구"/>
           <p:cNvSpPr txBox="1"/>
           <p:nvPr/>
         </p:nvSpPr>
         <p:spPr>
           <a:xfrm>
-            <a:off x="853418" y="3749039"/>
-            <a:ext cx="6095847" cy="822960"/>
+            <a:off x="6827349" y="3886200"/>
+            <a:ext cx="4632844" cy="822960"/>
           </a:xfrm>
           <a:prstGeom prst="rect">
             <a:avLst/>
@@ -3383,9 +3477,9 @@
               </a:lnSpc>
             </a:pPr>
             <a:r>
-              <a:rPr sz="1700" b="0" i="1">
-                <a:solidFill>
-                  <a:srgbClr val="4E226D"/>
+              <a:rPr sz="1700" b="0" i="0">
+                <a:solidFill>
+                  <a:srgbClr val="26231F"/>
                 </a:solidFill>
               </a:rPr>
               <a:t>라일락 골목을 걷다 멈춘 저녁</a:t>
@@ -3395,14 +3489,14 @@
       </p:sp>
       <p:sp>
         <p:nvSpPr>
-          <p:cNvPr id="5" name="안내 문구"/>
+          <p:cNvPr id="7" name="안내 문구"/>
           <p:cNvSpPr txBox="1"/>
           <p:nvPr/>
         </p:nvSpPr>
         <p:spPr>
           <a:xfrm>
-            <a:off x="853418" y="4617720"/>
-            <a:ext cx="6095847" cy="914400"/>
+            <a:off x="6827349" y="4754880"/>
+            <a:ext cx="4632844" cy="914400"/>
           </a:xfrm>
           <a:prstGeom prst="rect">
             <a:avLst/>
@@ -3423,10 +3517,10 @@
             <a:r>
               <a:rPr sz="1400" b="0" i="0">
                 <a:solidFill>
-                  <a:srgbClr val="666666"/>
+                  <a:srgbClr val="26231F"/>
                 </a:solidFill>
               </a:rPr>
-              <a:t>우리 부부 · 2027. 00. 00</a:t>
+              <a:t>우리 부부 · 날짜 입력</a:t>
             </a:r>
           </a:p>
         </p:txBody>
@@ -3465,14 +3559,14 @@
         </p:nvSpPr>
         <p:spPr>
           <a:xfrm>
-            <a:off x="9905695" y="-1463040"/>
-            <a:ext cx="3840480" cy="3840480"/>
-          </a:xfrm>
-          <a:prstGeom prst="ellipse">
+            <a:off x="640080" y="566928"/>
+            <a:ext cx="10911535" cy="10972"/>
+          </a:xfrm>
+          <a:prstGeom prst="rect">
             <a:avLst/>
           </a:prstGeom>
           <a:solidFill>
-            <a:srgbClr val="E8D4F7"/>
+            <a:srgbClr val="26231F"/>
           </a:solidFill>
           <a:ln>
             <a:noFill/>
@@ -3488,20 +3582,58 @@
       </p:sp>
       <p:sp>
         <p:nvSpPr>
-          <p:cNvPr id="4" name="장식"/>
+          <p:cNvPr id="4" name="상단 라벨"/>
+          <p:cNvSpPr txBox="1"/>
+          <p:nvPr/>
+        </p:nvSpPr>
+        <p:spPr>
+          <a:xfrm>
+            <a:off x="640080" y="237744"/>
+            <a:ext cx="5486400" cy="274320"/>
+          </a:xfrm>
+          <a:prstGeom prst="rect">
+            <a:avLst/>
+          </a:prstGeom>
+          <a:noFill/>
+        </p:spPr>
+        <p:txBody>
+          <a:bodyPr wrap="square" lIns="54864" rIns="54864" tIns="27432" bIns="27432" anchor="ctr">
+            <a:noAutofit/>
+          </a:bodyPr>
+          <a:lstStyle/>
+          <a:p>
+            <a:pPr algn="l">
+              <a:lnSpc>
+                <a:spcPct val="115000"/>
+              </a:lnSpc>
+            </a:pPr>
+            <a:r>
+              <a:rPr sz="900" b="1" i="0" spc="250">
+                <a:solidFill>
+                  <a:srgbClr val="26231F"/>
+                </a:solidFill>
+              </a:rPr>
+              <a:t>FAMILY ALBUM</a:t>
+            </a:r>
+          </a:p>
+        </p:txBody>
+      </p:sp>
+      <p:sp>
+        <p:nvSpPr>
+          <p:cNvPr id="5" name="포인트"/>
           <p:cNvSpPr/>
           <p:nvPr/>
         </p:nvSpPr>
         <p:spPr>
           <a:xfrm>
-            <a:off x="11094415" y="274320"/>
-            <a:ext cx="411480" cy="411480"/>
-          </a:xfrm>
-          <a:prstGeom prst="ellipse">
+            <a:off x="11204143" y="246888"/>
+            <a:ext cx="237744" cy="237744"/>
+          </a:xfrm>
+          <a:prstGeom prst="round2SameRect">
             <a:avLst/>
           </a:prstGeom>
           <a:solidFill>
-            <a:srgbClr val="9651C8"/>
+            <a:srgbClr val="C997ED"/>
           </a:solidFill>
           <a:ln>
             <a:noFill/>
@@ -3527,8 +3659,8 @@
         </p:nvSpPr>
         <p:spPr>
           <a:xfrm>
-            <a:off x="640080" y="457200"/>
-            <a:ext cx="9722815" cy="868680"/>
+            <a:off x="640080" y="731520"/>
+            <a:ext cx="10911535" cy="822960"/>
           </a:xfrm>
         </p:spPr>
         <p:txBody>
@@ -3545,7 +3677,7 @@
             <a:r>
               <a:rPr sz="3000" b="1" i="0">
                 <a:solidFill>
-                  <a:srgbClr val="4E226D"/>
+                  <a:srgbClr val="26231F"/>
                 </a:solidFill>
               </a:rPr>
               <a:t>가족 구성원</a:t>
@@ -3555,25 +3687,23 @@
       </p:sp>
       <p:sp>
         <p:nvSpPr>
-          <p:cNvPr id="5" name="사진 자리"/>
+          <p:cNvPr id="6" name="사진 자리"/>
           <p:cNvSpPr/>
           <p:nvPr/>
         </p:nvSpPr>
         <p:spPr>
           <a:xfrm>
-            <a:off x="2110663" y="1600200"/>
-            <a:ext cx="2400300" cy="2400300"/>
+            <a:off x="2167813" y="1783080"/>
+            <a:ext cx="2286000" cy="2286000"/>
           </a:xfrm>
           <a:prstGeom prst="ellipse">
             <a:avLst/>
           </a:prstGeom>
           <a:solidFill>
-            <a:srgbClr val="E8D4F7"/>
+            <a:srgbClr val="E9D1FA"/>
           </a:solidFill>
           <a:ln w="19050">
-            <a:solidFill>
-              <a:srgbClr val="9651C8"/>
-            </a:solidFill>
+            <a:noFill/>
             <a:prstDash val="dash"/>
           </a:ln>
         </p:spPr>
@@ -3591,7 +3721,7 @@
             <a:r>
               <a:rPr sz="1200" b="0" i="0">
                 <a:solidFill>
-                  <a:srgbClr val="4E226D"/>
+                  <a:srgbClr val="8E8780"/>
                 </a:solidFill>
               </a:rPr>
               <a:t>사진</a:t>
@@ -3601,13 +3731,13 @@
       </p:sp>
       <p:sp>
         <p:nvSpPr>
-          <p:cNvPr id="6" name="TextBox 5"/>
+          <p:cNvPr id="7" name="TextBox 6"/>
           <p:cNvSpPr txBox="1"/>
           <p:nvPr/>
         </p:nvSpPr>
         <p:spPr>
           <a:xfrm>
-            <a:off x="640080" y="4091939"/>
+            <a:off x="640080" y="4160520"/>
             <a:ext cx="5341467" cy="411480"/>
           </a:xfrm>
           <a:prstGeom prst="rect">
@@ -3629,7 +3759,7 @@
             <a:r>
               <a:rPr sz="1600" b="1" i="0">
                 <a:solidFill>
-                  <a:srgbClr val="4E226D"/>
+                  <a:srgbClr val="3B2749"/>
                 </a:solidFill>
               </a:rPr>
               <a:t>남편</a:t>
@@ -3639,14 +3769,14 @@
       </p:sp>
       <p:sp>
         <p:nvSpPr>
-          <p:cNvPr id="7" name="TextBox 6"/>
+          <p:cNvPr id="8" name="TextBox 7"/>
           <p:cNvSpPr txBox="1"/>
           <p:nvPr/>
         </p:nvSpPr>
         <p:spPr>
           <a:xfrm>
-            <a:off x="731519" y="4549140"/>
-            <a:ext cx="5158587" cy="1851660"/>
+            <a:off x="731519" y="4617720"/>
+            <a:ext cx="5158587" cy="1737360"/>
           </a:xfrm>
           <a:prstGeom prst="rect">
             <a:avLst/>
@@ -3707,25 +3837,23 @@
       </p:sp>
       <p:sp>
         <p:nvSpPr>
-          <p:cNvPr id="8" name="사진 자리"/>
+          <p:cNvPr id="9" name="사진 자리"/>
           <p:cNvSpPr/>
           <p:nvPr/>
         </p:nvSpPr>
         <p:spPr>
           <a:xfrm>
-            <a:off x="7680731" y="1600200"/>
-            <a:ext cx="2400300" cy="2400300"/>
+            <a:off x="7737881" y="1783080"/>
+            <a:ext cx="2286000" cy="2286000"/>
           </a:xfrm>
           <a:prstGeom prst="ellipse">
             <a:avLst/>
           </a:prstGeom>
           <a:solidFill>
-            <a:srgbClr val="E8D4F7"/>
+            <a:srgbClr val="E9D1FA"/>
           </a:solidFill>
           <a:ln w="19050">
-            <a:solidFill>
-              <a:srgbClr val="9651C8"/>
-            </a:solidFill>
+            <a:noFill/>
             <a:prstDash val="dash"/>
           </a:ln>
         </p:spPr>
@@ -3743,7 +3871,7 @@
             <a:r>
               <a:rPr sz="1200" b="0" i="0">
                 <a:solidFill>
-                  <a:srgbClr val="4E226D"/>
+                  <a:srgbClr val="8E8780"/>
                 </a:solidFill>
               </a:rPr>
               <a:t>사진</a:t>
@@ -3753,13 +3881,13 @@
       </p:sp>
       <p:sp>
         <p:nvSpPr>
-          <p:cNvPr id="9" name="TextBox 8"/>
+          <p:cNvPr id="10" name="TextBox 9"/>
           <p:cNvSpPr txBox="1"/>
           <p:nvPr/>
         </p:nvSpPr>
         <p:spPr>
           <a:xfrm>
-            <a:off x="6210147" y="4091939"/>
+            <a:off x="6210147" y="4160520"/>
             <a:ext cx="5341467" cy="411480"/>
           </a:xfrm>
           <a:prstGeom prst="rect">
@@ -3781,7 +3909,7 @@
             <a:r>
               <a:rPr sz="1600" b="1" i="0">
                 <a:solidFill>
-                  <a:srgbClr val="4E226D"/>
+                  <a:srgbClr val="3B2749"/>
                 </a:solidFill>
               </a:rPr>
               <a:t>아내</a:t>
@@ -3791,14 +3919,14 @@
       </p:sp>
       <p:sp>
         <p:nvSpPr>
-          <p:cNvPr id="10" name="TextBox 9"/>
+          <p:cNvPr id="11" name="TextBox 10"/>
           <p:cNvSpPr txBox="1"/>
           <p:nvPr/>
         </p:nvSpPr>
         <p:spPr>
           <a:xfrm>
-            <a:off x="6301587" y="4549140"/>
-            <a:ext cx="5158587" cy="1851660"/>
+            <a:off x="6301587" y="4617720"/>
+            <a:ext cx="5158587" cy="1737360"/>
           </a:xfrm>
           <a:prstGeom prst="rect">
             <a:avLst/>
@@ -3891,14 +4019,14 @@
         </p:nvSpPr>
         <p:spPr>
           <a:xfrm>
-            <a:off x="9905695" y="-1463040"/>
-            <a:ext cx="3840480" cy="3840480"/>
-          </a:xfrm>
-          <a:prstGeom prst="ellipse">
+            <a:off x="640080" y="566928"/>
+            <a:ext cx="10911535" cy="10972"/>
+          </a:xfrm>
+          <a:prstGeom prst="rect">
             <a:avLst/>
           </a:prstGeom>
           <a:solidFill>
-            <a:srgbClr val="E8D4F7"/>
+            <a:srgbClr val="26231F"/>
           </a:solidFill>
           <a:ln>
             <a:noFill/>
@@ -3914,20 +4042,58 @@
       </p:sp>
       <p:sp>
         <p:nvSpPr>
-          <p:cNvPr id="4" name="장식"/>
+          <p:cNvPr id="4" name="상단 라벨"/>
+          <p:cNvSpPr txBox="1"/>
+          <p:nvPr/>
+        </p:nvSpPr>
+        <p:spPr>
+          <a:xfrm>
+            <a:off x="640080" y="237744"/>
+            <a:ext cx="5486400" cy="274320"/>
+          </a:xfrm>
+          <a:prstGeom prst="rect">
+            <a:avLst/>
+          </a:prstGeom>
+          <a:noFill/>
+        </p:spPr>
+        <p:txBody>
+          <a:bodyPr wrap="square" lIns="54864" rIns="54864" tIns="27432" bIns="27432" anchor="ctr">
+            <a:noAutofit/>
+          </a:bodyPr>
+          <a:lstStyle/>
+          <a:p>
+            <a:pPr algn="l">
+              <a:lnSpc>
+                <a:spcPct val="115000"/>
+              </a:lnSpc>
+            </a:pPr>
+            <a:r>
+              <a:rPr sz="900" b="1" i="0" spc="250">
+                <a:solidFill>
+                  <a:srgbClr val="26231F"/>
+                </a:solidFill>
+              </a:rPr>
+              <a:t>FAMILY ALBUM</a:t>
+            </a:r>
+          </a:p>
+        </p:txBody>
+      </p:sp>
+      <p:sp>
+        <p:nvSpPr>
+          <p:cNvPr id="5" name="포인트"/>
           <p:cNvSpPr/>
           <p:nvPr/>
         </p:nvSpPr>
         <p:spPr>
           <a:xfrm>
-            <a:off x="11094415" y="274320"/>
-            <a:ext cx="411480" cy="411480"/>
-          </a:xfrm>
-          <a:prstGeom prst="ellipse">
+            <a:off x="11204143" y="246888"/>
+            <a:ext cx="237744" cy="237744"/>
+          </a:xfrm>
+          <a:prstGeom prst="round2SameRect">
             <a:avLst/>
           </a:prstGeom>
           <a:solidFill>
-            <a:srgbClr val="9651C8"/>
+            <a:srgbClr val="C997ED"/>
           </a:solidFill>
           <a:ln>
             <a:noFill/>
@@ -3953,8 +4119,8 @@
         </p:nvSpPr>
         <p:spPr>
           <a:xfrm>
-            <a:off x="640080" y="457200"/>
-            <a:ext cx="9722815" cy="868680"/>
+            <a:off x="640080" y="731520"/>
+            <a:ext cx="10911535" cy="822960"/>
           </a:xfrm>
         </p:spPr>
         <p:txBody>
@@ -3971,7 +4137,7 @@
             <a:r>
               <a:rPr sz="3000" b="1" i="0">
                 <a:solidFill>
-                  <a:srgbClr val="4E226D"/>
+                  <a:srgbClr val="26231F"/>
                 </a:solidFill>
               </a:rPr>
               <a:t>우리 가족 이야기</a:t>
@@ -3981,20 +4147,20 @@
       </p:sp>
       <p:sp>
         <p:nvSpPr>
-          <p:cNvPr id="5" name="타임라인 선"/>
+          <p:cNvPr id="6" name="타임라인 선"/>
           <p:cNvSpPr/>
           <p:nvPr/>
         </p:nvSpPr>
         <p:spPr>
           <a:xfrm>
-            <a:off x="640080" y="3337560"/>
+            <a:off x="640080" y="3520440"/>
             <a:ext cx="10911535" cy="54864"/>
           </a:xfrm>
           <a:prstGeom prst="rect">
             <a:avLst/>
           </a:prstGeom>
           <a:solidFill>
-            <a:srgbClr val="E8D4F7"/>
+            <a:srgbClr val="E9D1FA"/>
           </a:solidFill>
           <a:ln>
             <a:noFill/>
@@ -4010,20 +4176,20 @@
       </p:sp>
       <p:sp>
         <p:nvSpPr>
-          <p:cNvPr id="6" name="때 1"/>
+          <p:cNvPr id="7" name="때 1"/>
           <p:cNvSpPr/>
           <p:nvPr/>
         </p:nvSpPr>
         <p:spPr>
           <a:xfrm>
-            <a:off x="1802853" y="3154680"/>
+            <a:off x="1802853" y="3337560"/>
             <a:ext cx="402336" cy="402336"/>
           </a:xfrm>
           <a:prstGeom prst="ellipse">
             <a:avLst/>
           </a:prstGeom>
           <a:solidFill>
-            <a:srgbClr val="9651C8"/>
+            <a:srgbClr val="C997ED"/>
           </a:solidFill>
           <a:ln w="38100">
             <a:solidFill>
@@ -4041,13 +4207,13 @@
       </p:sp>
       <p:sp>
         <p:nvSpPr>
-          <p:cNvPr id="7" name="TextBox 6"/>
+          <p:cNvPr id="8" name="TextBox 7"/>
           <p:cNvSpPr txBox="1"/>
           <p:nvPr/>
         </p:nvSpPr>
         <p:spPr>
           <a:xfrm>
-            <a:off x="685800" y="2514600"/>
+            <a:off x="685800" y="2697480"/>
             <a:ext cx="2636443" cy="457200"/>
           </a:xfrm>
           <a:prstGeom prst="rect">
@@ -4069,7 +4235,7 @@
             <a:r>
               <a:rPr sz="1600" b="1" i="0">
                 <a:solidFill>
-                  <a:srgbClr val="9651C8"/>
+                  <a:srgbClr val="C997ED"/>
                 </a:solidFill>
               </a:rPr>
               <a:t>처음 만난 날</a:t>
@@ -4079,13 +4245,13 @@
       </p:sp>
       <p:sp>
         <p:nvSpPr>
-          <p:cNvPr id="8" name="TextBox 7"/>
+          <p:cNvPr id="9" name="TextBox 8"/>
           <p:cNvSpPr txBox="1"/>
           <p:nvPr/>
         </p:nvSpPr>
         <p:spPr>
           <a:xfrm>
-            <a:off x="731519" y="3703320"/>
+            <a:off x="731519" y="3886200"/>
             <a:ext cx="2545003" cy="457200"/>
           </a:xfrm>
           <a:prstGeom prst="rect">
@@ -4107,7 +4273,7 @@
             <a:r>
               <a:rPr sz="1800" b="1" i="0">
                 <a:solidFill>
-                  <a:srgbClr val="4E226D"/>
+                  <a:srgbClr val="3B2749"/>
                 </a:solidFill>
               </a:rPr>
               <a:t>첫 만남</a:t>
@@ -4117,13 +4283,13 @@
       </p:sp>
       <p:sp>
         <p:nvSpPr>
-          <p:cNvPr id="9" name="TextBox 8"/>
+          <p:cNvPr id="10" name="TextBox 9"/>
           <p:cNvSpPr txBox="1"/>
           <p:nvPr/>
         </p:nvSpPr>
         <p:spPr>
           <a:xfrm>
-            <a:off x="731519" y="4206240"/>
+            <a:off x="731519" y="4389120"/>
             <a:ext cx="2545003" cy="1645920"/>
           </a:xfrm>
           <a:prstGeom prst="rect">
@@ -4145,7 +4311,7 @@
             <a:r>
               <a:rPr sz="1500" b="0" i="0">
                 <a:solidFill>
-                  <a:srgbClr val="2B2B2B"/>
+                  <a:srgbClr val="26231F"/>
                 </a:solidFill>
               </a:rPr>
               <a:t>어디에서 어떻게 만났나요?</a:t>
@@ -4155,20 +4321,20 @@
       </p:sp>
       <p:sp>
         <p:nvSpPr>
-          <p:cNvPr id="10" name="때 2"/>
+          <p:cNvPr id="11" name="때 2"/>
           <p:cNvSpPr/>
           <p:nvPr/>
         </p:nvSpPr>
         <p:spPr>
           <a:xfrm>
-            <a:off x="4530737" y="3154680"/>
+            <a:off x="4530737" y="3337560"/>
             <a:ext cx="402336" cy="402336"/>
           </a:xfrm>
           <a:prstGeom prst="ellipse">
             <a:avLst/>
           </a:prstGeom>
           <a:solidFill>
-            <a:srgbClr val="9651C8"/>
+            <a:srgbClr val="C997ED"/>
           </a:solidFill>
           <a:ln w="38100">
             <a:solidFill>
@@ -4186,13 +4352,13 @@
       </p:sp>
       <p:sp>
         <p:nvSpPr>
-          <p:cNvPr id="11" name="TextBox 10"/>
+          <p:cNvPr id="12" name="TextBox 11"/>
           <p:cNvSpPr txBox="1"/>
           <p:nvPr/>
         </p:nvSpPr>
         <p:spPr>
           <a:xfrm>
-            <a:off x="3413683" y="2514600"/>
+            <a:off x="3413683" y="2697480"/>
             <a:ext cx="2636443" cy="457200"/>
           </a:xfrm>
           <a:prstGeom prst="rect">
@@ -4214,7 +4380,7 @@
             <a:r>
               <a:rPr sz="1600" b="1" i="0">
                 <a:solidFill>
-                  <a:srgbClr val="9651C8"/>
+                  <a:srgbClr val="C997ED"/>
                 </a:solidFill>
               </a:rPr>
               <a:t>결혼</a:t>
@@ -4224,13 +4390,13 @@
       </p:sp>
       <p:sp>
         <p:nvSpPr>
-          <p:cNvPr id="12" name="TextBox 11"/>
+          <p:cNvPr id="13" name="TextBox 12"/>
           <p:cNvSpPr txBox="1"/>
           <p:nvPr/>
         </p:nvSpPr>
         <p:spPr>
           <a:xfrm>
-            <a:off x="3459403" y="3703320"/>
+            <a:off x="3459403" y="3886200"/>
             <a:ext cx="2545003" cy="457200"/>
           </a:xfrm>
           <a:prstGeom prst="rect">
@@ -4252,7 +4418,7 @@
             <a:r>
               <a:rPr sz="1800" b="1" i="0">
                 <a:solidFill>
-                  <a:srgbClr val="4E226D"/>
+                  <a:srgbClr val="3B2749"/>
                 </a:solidFill>
               </a:rPr>
               <a:t>함께 시작한 날</a:t>
@@ -4262,13 +4428,13 @@
       </p:sp>
       <p:sp>
         <p:nvSpPr>
-          <p:cNvPr id="13" name="TextBox 12"/>
+          <p:cNvPr id="14" name="TextBox 13"/>
           <p:cNvSpPr txBox="1"/>
           <p:nvPr/>
         </p:nvSpPr>
         <p:spPr>
           <a:xfrm>
-            <a:off x="3459403" y="4206240"/>
+            <a:off x="3459403" y="4389120"/>
             <a:ext cx="2545003" cy="1645920"/>
           </a:xfrm>
           <a:prstGeom prst="rect">
@@ -4290,7 +4456,7 @@
             <a:r>
               <a:rPr sz="1500" b="0" i="0">
                 <a:solidFill>
-                  <a:srgbClr val="2B2B2B"/>
+                  <a:srgbClr val="26231F"/>
                 </a:solidFill>
               </a:rPr>
               <a:t>그날의 기억을 적어요</a:t>
@@ -4300,20 +4466,20 @@
       </p:sp>
       <p:sp>
         <p:nvSpPr>
-          <p:cNvPr id="14" name="때 3"/>
+          <p:cNvPr id="15" name="때 3"/>
           <p:cNvSpPr/>
           <p:nvPr/>
         </p:nvSpPr>
         <p:spPr>
           <a:xfrm>
-            <a:off x="7258621" y="3154680"/>
+            <a:off x="7258621" y="3337560"/>
             <a:ext cx="402336" cy="402336"/>
           </a:xfrm>
           <a:prstGeom prst="ellipse">
             <a:avLst/>
           </a:prstGeom>
           <a:solidFill>
-            <a:srgbClr val="9651C8"/>
+            <a:srgbClr val="C997ED"/>
           </a:solidFill>
           <a:ln w="38100">
             <a:solidFill>
@@ -4331,13 +4497,13 @@
       </p:sp>
       <p:sp>
         <p:nvSpPr>
-          <p:cNvPr id="15" name="TextBox 14"/>
+          <p:cNvPr id="16" name="TextBox 15"/>
           <p:cNvSpPr txBox="1"/>
           <p:nvPr/>
         </p:nvSpPr>
         <p:spPr>
           <a:xfrm>
-            <a:off x="6141567" y="2514600"/>
+            <a:off x="6141567" y="2697480"/>
             <a:ext cx="2636443" cy="457200"/>
           </a:xfrm>
           <a:prstGeom prst="rect">
@@ -4359,7 +4525,7 @@
             <a:r>
               <a:rPr sz="1600" b="1" i="0">
                 <a:solidFill>
-                  <a:srgbClr val="9651C8"/>
+                  <a:srgbClr val="C997ED"/>
                 </a:solidFill>
               </a:rPr>
               <a:t>첫 집</a:t>
@@ -4369,13 +4535,13 @@
       </p:sp>
       <p:sp>
         <p:nvSpPr>
-          <p:cNvPr id="16" name="TextBox 15"/>
+          <p:cNvPr id="17" name="TextBox 16"/>
           <p:cNvSpPr txBox="1"/>
           <p:nvPr/>
         </p:nvSpPr>
         <p:spPr>
           <a:xfrm>
-            <a:off x="6187287" y="3703320"/>
+            <a:off x="6187287" y="3886200"/>
             <a:ext cx="2545003" cy="457200"/>
           </a:xfrm>
           <a:prstGeom prst="rect">
@@ -4397,7 +4563,7 @@
             <a:r>
               <a:rPr sz="1800" b="1" i="0">
                 <a:solidFill>
-                  <a:srgbClr val="4E226D"/>
+                  <a:srgbClr val="3B2749"/>
                 </a:solidFill>
               </a:rPr>
               <a:t>우리의 보금자리</a:t>
@@ -4407,13 +4573,13 @@
       </p:sp>
       <p:sp>
         <p:nvSpPr>
-          <p:cNvPr id="17" name="TextBox 16"/>
+          <p:cNvPr id="18" name="TextBox 17"/>
           <p:cNvSpPr txBox="1"/>
           <p:nvPr/>
         </p:nvSpPr>
         <p:spPr>
           <a:xfrm>
-            <a:off x="6187287" y="4206240"/>
+            <a:off x="6187287" y="4389120"/>
             <a:ext cx="2545003" cy="1645920"/>
           </a:xfrm>
           <a:prstGeom prst="rect">
@@ -4435,7 +4601,7 @@
             <a:r>
               <a:rPr sz="1500" b="0" i="0">
                 <a:solidFill>
-                  <a:srgbClr val="2B2B2B"/>
+                  <a:srgbClr val="26231F"/>
                 </a:solidFill>
               </a:rPr>
               <a:t>처음 이사한 날</a:t>
@@ -4445,20 +4611,20 @@
       </p:sp>
       <p:sp>
         <p:nvSpPr>
-          <p:cNvPr id="18" name="때 4"/>
+          <p:cNvPr id="19" name="때 4"/>
           <p:cNvSpPr/>
           <p:nvPr/>
         </p:nvSpPr>
         <p:spPr>
           <a:xfrm>
-            <a:off x="9986505" y="3154680"/>
+            <a:off x="9986505" y="3337560"/>
             <a:ext cx="402336" cy="402336"/>
           </a:xfrm>
           <a:prstGeom prst="ellipse">
             <a:avLst/>
           </a:prstGeom>
           <a:solidFill>
-            <a:srgbClr val="9651C8"/>
+            <a:srgbClr val="C997ED"/>
           </a:solidFill>
           <a:ln w="38100">
             <a:solidFill>
@@ -4476,13 +4642,13 @@
       </p:sp>
       <p:sp>
         <p:nvSpPr>
-          <p:cNvPr id="19" name="TextBox 18"/>
+          <p:cNvPr id="20" name="TextBox 19"/>
           <p:cNvSpPr txBox="1"/>
           <p:nvPr/>
         </p:nvSpPr>
         <p:spPr>
           <a:xfrm>
-            <a:off x="8869451" y="2514600"/>
+            <a:off x="8869451" y="2697480"/>
             <a:ext cx="2636443" cy="457200"/>
           </a:xfrm>
           <a:prstGeom prst="rect">
@@ -4504,7 +4670,7 @@
             <a:r>
               <a:rPr sz="1600" b="1" i="0">
                 <a:solidFill>
-                  <a:srgbClr val="9651C8"/>
+                  <a:srgbClr val="C997ED"/>
                 </a:solidFill>
               </a:rPr>
               <a:t>지금</a:t>
@@ -4514,13 +4680,13 @@
       </p:sp>
       <p:sp>
         <p:nvSpPr>
-          <p:cNvPr id="20" name="TextBox 19"/>
+          <p:cNvPr id="21" name="TextBox 20"/>
           <p:cNvSpPr txBox="1"/>
           <p:nvPr/>
         </p:nvSpPr>
         <p:spPr>
           <a:xfrm>
-            <a:off x="8915171" y="3703320"/>
+            <a:off x="8915171" y="3886200"/>
             <a:ext cx="2545003" cy="457200"/>
           </a:xfrm>
           <a:prstGeom prst="rect">
@@ -4542,7 +4708,7 @@
             <a:r>
               <a:rPr sz="1800" b="1" i="0">
                 <a:solidFill>
-                  <a:srgbClr val="4E226D"/>
+                  <a:srgbClr val="3B2749"/>
                 </a:solidFill>
               </a:rPr>
               <a:t>오늘의 우리</a:t>
@@ -4552,13 +4718,13 @@
       </p:sp>
       <p:sp>
         <p:nvSpPr>
-          <p:cNvPr id="21" name="TextBox 20"/>
+          <p:cNvPr id="22" name="TextBox 21"/>
           <p:cNvSpPr txBox="1"/>
           <p:nvPr/>
         </p:nvSpPr>
         <p:spPr>
           <a:xfrm>
-            <a:off x="8915171" y="4206240"/>
+            <a:off x="8915171" y="4389120"/>
             <a:ext cx="2545003" cy="1645920"/>
           </a:xfrm>
           <a:prstGeom prst="rect">
@@ -4580,7 +4746,7 @@
             <a:r>
               <a:rPr sz="1500" b="0" i="0">
                 <a:solidFill>
-                  <a:srgbClr val="2B2B2B"/>
+                  <a:srgbClr val="26231F"/>
                 </a:solidFill>
               </a:rPr>
               <a:t>요즘 우리 이야기</a:t>
@@ -4622,14 +4788,14 @@
         </p:nvSpPr>
         <p:spPr>
           <a:xfrm>
-            <a:off x="9905695" y="-1463040"/>
-            <a:ext cx="3840480" cy="3840480"/>
-          </a:xfrm>
-          <a:prstGeom prst="ellipse">
+            <a:off x="640080" y="566928"/>
+            <a:ext cx="10911535" cy="10972"/>
+          </a:xfrm>
+          <a:prstGeom prst="rect">
             <a:avLst/>
           </a:prstGeom>
           <a:solidFill>
-            <a:srgbClr val="E8D4F7"/>
+            <a:srgbClr val="26231F"/>
           </a:solidFill>
           <a:ln>
             <a:noFill/>
@@ -4645,20 +4811,58 @@
       </p:sp>
       <p:sp>
         <p:nvSpPr>
-          <p:cNvPr id="4" name="장식"/>
+          <p:cNvPr id="4" name="상단 라벨"/>
+          <p:cNvSpPr txBox="1"/>
+          <p:nvPr/>
+        </p:nvSpPr>
+        <p:spPr>
+          <a:xfrm>
+            <a:off x="640080" y="237744"/>
+            <a:ext cx="5486400" cy="274320"/>
+          </a:xfrm>
+          <a:prstGeom prst="rect">
+            <a:avLst/>
+          </a:prstGeom>
+          <a:noFill/>
+        </p:spPr>
+        <p:txBody>
+          <a:bodyPr wrap="square" lIns="54864" rIns="54864" tIns="27432" bIns="27432" anchor="ctr">
+            <a:noAutofit/>
+          </a:bodyPr>
+          <a:lstStyle/>
+          <a:p>
+            <a:pPr algn="l">
+              <a:lnSpc>
+                <a:spcPct val="115000"/>
+              </a:lnSpc>
+            </a:pPr>
+            <a:r>
+              <a:rPr sz="900" b="1" i="0" spc="250">
+                <a:solidFill>
+                  <a:srgbClr val="26231F"/>
+                </a:solidFill>
+              </a:rPr>
+              <a:t>FAMILY ALBUM</a:t>
+            </a:r>
+          </a:p>
+        </p:txBody>
+      </p:sp>
+      <p:sp>
+        <p:nvSpPr>
+          <p:cNvPr id="5" name="포인트"/>
           <p:cNvSpPr/>
           <p:nvPr/>
         </p:nvSpPr>
         <p:spPr>
           <a:xfrm>
-            <a:off x="11094415" y="274320"/>
-            <a:ext cx="411480" cy="411480"/>
-          </a:xfrm>
-          <a:prstGeom prst="ellipse">
+            <a:off x="11204143" y="246888"/>
+            <a:ext cx="237744" cy="237744"/>
+          </a:xfrm>
+          <a:prstGeom prst="round2SameRect">
             <a:avLst/>
           </a:prstGeom>
           <a:solidFill>
-            <a:srgbClr val="9651C8"/>
+            <a:srgbClr val="C997ED"/>
           </a:solidFill>
           <a:ln>
             <a:noFill/>
@@ -4684,8 +4888,8 @@
         </p:nvSpPr>
         <p:spPr>
           <a:xfrm>
-            <a:off x="640080" y="457200"/>
-            <a:ext cx="9722815" cy="868680"/>
+            <a:off x="640080" y="731520"/>
+            <a:ext cx="10911535" cy="822960"/>
           </a:xfrm>
         </p:spPr>
         <p:txBody>
@@ -4702,7 +4906,7 @@
             <a:r>
               <a:rPr sz="3000" b="1" i="0">
                 <a:solidFill>
-                  <a:srgbClr val="4E226D"/>
+                  <a:srgbClr val="26231F"/>
                 </a:solidFill>
               </a:rPr>
               <a:t>우리 가족의 약속</a:t>
@@ -4712,27 +4916,25 @@
       </p:sp>
       <p:sp>
         <p:nvSpPr>
-          <p:cNvPr id="5" name="줄 1"/>
+          <p:cNvPr id="6" name="줄 1"/>
           <p:cNvSpPr/>
           <p:nvPr/>
         </p:nvSpPr>
         <p:spPr>
           <a:xfrm>
-            <a:off x="640080" y="1600200"/>
+            <a:off x="640080" y="1783080"/>
             <a:ext cx="10911535" cy="1005840"/>
           </a:xfrm>
           <a:prstGeom prst="roundRect">
             <a:avLst>
-              <a:gd name="adj" fmla="val 8000"/>
+              <a:gd name="adj" fmla="val 4000"/>
             </a:avLst>
           </a:prstGeom>
           <a:solidFill>
-            <a:srgbClr val="F8F3FC"/>
+            <a:srgbClr val="F5EAFD"/>
           </a:solidFill>
-          <a:ln w="12700">
-            <a:solidFill>
-              <a:srgbClr val="E8D4F7"/>
-            </a:solidFill>
+          <a:ln>
+            <a:noFill/>
           </a:ln>
         </p:spPr>
         <p:txBody>
@@ -4745,20 +4947,49 @@
       </p:sp>
       <p:sp>
         <p:nvSpPr>
-          <p:cNvPr id="6" name="번호 1"/>
+          <p:cNvPr id="7" name="포인트 막대"/>
           <p:cNvSpPr/>
           <p:nvPr/>
         </p:nvSpPr>
         <p:spPr>
           <a:xfrm>
-            <a:off x="822959" y="1874519"/>
+            <a:off x="640080" y="1892807"/>
+            <a:ext cx="54864" cy="786384"/>
+          </a:xfrm>
+          <a:prstGeom prst="rect">
+            <a:avLst/>
+          </a:prstGeom>
+          <a:solidFill>
+            <a:srgbClr val="C997ED"/>
+          </a:solidFill>
+          <a:ln>
+            <a:noFill/>
+          </a:ln>
+        </p:spPr>
+        <p:txBody>
+          <a:bodyPr rtlCol="0" anchor="ctr"/>
+          <a:lstStyle/>
+          <a:p>
+            <a:pPr algn="ctr"/>
+          </a:p>
+        </p:txBody>
+      </p:sp>
+      <p:sp>
+        <p:nvSpPr>
+          <p:cNvPr id="8" name="번호 1"/>
+          <p:cNvSpPr/>
+          <p:nvPr/>
+        </p:nvSpPr>
+        <p:spPr>
+          <a:xfrm>
+            <a:off x="822959" y="2057400"/>
             <a:ext cx="457200" cy="457200"/>
           </a:xfrm>
           <a:prstGeom prst="ellipse">
             <a:avLst/>
           </a:prstGeom>
           <a:solidFill>
-            <a:srgbClr val="9651C8"/>
+            <a:srgbClr val="C997ED"/>
           </a:solidFill>
           <a:ln>
             <a:noFill/>
@@ -4778,7 +5009,7 @@
             <a:r>
               <a:rPr sz="1600" b="1" i="0">
                 <a:solidFill>
-                  <a:srgbClr val="FFFFFF"/>
+                  <a:srgbClr val="26231F"/>
                 </a:solidFill>
               </a:rPr>
               <a:t>1</a:t>
@@ -4788,13 +5019,13 @@
       </p:sp>
       <p:sp>
         <p:nvSpPr>
-          <p:cNvPr id="7" name="TextBox 6"/>
+          <p:cNvPr id="9" name="TextBox 8"/>
           <p:cNvSpPr txBox="1"/>
           <p:nvPr/>
         </p:nvSpPr>
         <p:spPr>
           <a:xfrm>
-            <a:off x="1508760" y="1645920"/>
+            <a:off x="1508760" y="1828800"/>
             <a:ext cx="2743200" cy="914400"/>
           </a:xfrm>
           <a:prstGeom prst="rect">
@@ -4816,7 +5047,7 @@
             <a:r>
               <a:rPr sz="1800" b="1" i="0">
                 <a:solidFill>
-                  <a:srgbClr val="4E226D"/>
+                  <a:srgbClr val="3B2749"/>
                 </a:solidFill>
               </a:rPr>
               <a:t>약속 1</a:t>
@@ -4826,13 +5057,13 @@
       </p:sp>
       <p:sp>
         <p:nvSpPr>
-          <p:cNvPr id="8" name="TextBox 7"/>
+          <p:cNvPr id="10" name="TextBox 9"/>
           <p:cNvSpPr txBox="1"/>
           <p:nvPr/>
         </p:nvSpPr>
         <p:spPr>
           <a:xfrm>
-            <a:off x="4297680" y="1645920"/>
+            <a:off x="4297680" y="1828800"/>
             <a:ext cx="7071055" cy="914400"/>
           </a:xfrm>
           <a:prstGeom prst="rect">
@@ -4854,7 +5085,7 @@
             <a:r>
               <a:rPr sz="1700" b="0" i="0">
                 <a:solidFill>
-                  <a:srgbClr val="2B2B2B"/>
+                  <a:srgbClr val="26231F"/>
                 </a:solidFill>
               </a:rPr>
               <a:t>하루에 한 번 서로 안아 주기</a:t>
@@ -4864,27 +5095,25 @@
       </p:sp>
       <p:sp>
         <p:nvSpPr>
-          <p:cNvPr id="9" name="줄 2"/>
+          <p:cNvPr id="11" name="줄 2"/>
           <p:cNvSpPr/>
           <p:nvPr/>
         </p:nvSpPr>
         <p:spPr>
           <a:xfrm>
-            <a:off x="640080" y="2743200"/>
+            <a:off x="640080" y="2926080"/>
             <a:ext cx="10911535" cy="1005840"/>
           </a:xfrm>
           <a:prstGeom prst="roundRect">
             <a:avLst>
-              <a:gd name="adj" fmla="val 8000"/>
+              <a:gd name="adj" fmla="val 4000"/>
             </a:avLst>
           </a:prstGeom>
           <a:solidFill>
-            <a:srgbClr val="F8F3FC"/>
+            <a:srgbClr val="F5EAFD"/>
           </a:solidFill>
-          <a:ln w="12700">
-            <a:solidFill>
-              <a:srgbClr val="E8D4F7"/>
-            </a:solidFill>
+          <a:ln>
+            <a:noFill/>
           </a:ln>
         </p:spPr>
         <p:txBody>
@@ -4897,20 +5126,49 @@
       </p:sp>
       <p:sp>
         <p:nvSpPr>
-          <p:cNvPr id="10" name="번호 2"/>
+          <p:cNvPr id="12" name="포인트 막대"/>
           <p:cNvSpPr/>
           <p:nvPr/>
         </p:nvSpPr>
         <p:spPr>
           <a:xfrm>
-            <a:off x="822959" y="3017520"/>
+            <a:off x="640080" y="3035808"/>
+            <a:ext cx="54864" cy="786384"/>
+          </a:xfrm>
+          <a:prstGeom prst="rect">
+            <a:avLst/>
+          </a:prstGeom>
+          <a:solidFill>
+            <a:srgbClr val="C997ED"/>
+          </a:solidFill>
+          <a:ln>
+            <a:noFill/>
+          </a:ln>
+        </p:spPr>
+        <p:txBody>
+          <a:bodyPr rtlCol="0" anchor="ctr"/>
+          <a:lstStyle/>
+          <a:p>
+            <a:pPr algn="ctr"/>
+          </a:p>
+        </p:txBody>
+      </p:sp>
+      <p:sp>
+        <p:nvSpPr>
+          <p:cNvPr id="13" name="번호 2"/>
+          <p:cNvSpPr/>
+          <p:nvPr/>
+        </p:nvSpPr>
+        <p:spPr>
+          <a:xfrm>
+            <a:off x="822959" y="3200400"/>
             <a:ext cx="457200" cy="457200"/>
           </a:xfrm>
           <a:prstGeom prst="ellipse">
             <a:avLst/>
           </a:prstGeom>
           <a:solidFill>
-            <a:srgbClr val="9651C8"/>
+            <a:srgbClr val="C997ED"/>
           </a:solidFill>
           <a:ln>
             <a:noFill/>
@@ -4930,7 +5188,7 @@
             <a:r>
               <a:rPr sz="1600" b="1" i="0">
                 <a:solidFill>
-                  <a:srgbClr val="FFFFFF"/>
+                  <a:srgbClr val="26231F"/>
                 </a:solidFill>
               </a:rPr>
               <a:t>2</a:t>
@@ -4940,13 +5198,13 @@
       </p:sp>
       <p:sp>
         <p:nvSpPr>
-          <p:cNvPr id="11" name="TextBox 10"/>
+          <p:cNvPr id="14" name="TextBox 13"/>
           <p:cNvSpPr txBox="1"/>
           <p:nvPr/>
         </p:nvSpPr>
         <p:spPr>
           <a:xfrm>
-            <a:off x="1508760" y="2788920"/>
+            <a:off x="1508760" y="2971800"/>
             <a:ext cx="2743200" cy="914400"/>
           </a:xfrm>
           <a:prstGeom prst="rect">
@@ -4968,7 +5226,7 @@
             <a:r>
               <a:rPr sz="1800" b="1" i="0">
                 <a:solidFill>
-                  <a:srgbClr val="4E226D"/>
+                  <a:srgbClr val="3B2749"/>
                 </a:solidFill>
               </a:rPr>
               <a:t>약속 2</a:t>
@@ -4978,13 +5236,13 @@
       </p:sp>
       <p:sp>
         <p:nvSpPr>
-          <p:cNvPr id="12" name="TextBox 11"/>
+          <p:cNvPr id="15" name="TextBox 14"/>
           <p:cNvSpPr txBox="1"/>
           <p:nvPr/>
         </p:nvSpPr>
         <p:spPr>
           <a:xfrm>
-            <a:off x="4297680" y="2788920"/>
+            <a:off x="4297680" y="2971800"/>
             <a:ext cx="7071055" cy="914400"/>
           </a:xfrm>
           <a:prstGeom prst="rect">
@@ -5006,7 +5264,7 @@
             <a:r>
               <a:rPr sz="1700" b="0" i="0">
                 <a:solidFill>
-                  <a:srgbClr val="2B2B2B"/>
+                  <a:srgbClr val="26231F"/>
                 </a:solidFill>
               </a:rPr>
               <a:t>화가 나도 잠자리 전엔 풀기</a:t>
@@ -5016,27 +5274,25 @@
       </p:sp>
       <p:sp>
         <p:nvSpPr>
-          <p:cNvPr id="13" name="줄 3"/>
+          <p:cNvPr id="16" name="줄 3"/>
           <p:cNvSpPr/>
           <p:nvPr/>
         </p:nvSpPr>
         <p:spPr>
           <a:xfrm>
-            <a:off x="640080" y="3886200"/>
+            <a:off x="640080" y="4069080"/>
             <a:ext cx="10911535" cy="1005840"/>
           </a:xfrm>
           <a:prstGeom prst="roundRect">
             <a:avLst>
-              <a:gd name="adj" fmla="val 8000"/>
+              <a:gd name="adj" fmla="val 4000"/>
             </a:avLst>
           </a:prstGeom>
           <a:solidFill>
-            <a:srgbClr val="F8F3FC"/>
+            <a:srgbClr val="F5EAFD"/>
           </a:solidFill>
-          <a:ln w="12700">
-            <a:solidFill>
-              <a:srgbClr val="E8D4F7"/>
-            </a:solidFill>
+          <a:ln>
+            <a:noFill/>
           </a:ln>
         </p:spPr>
         <p:txBody>
@@ -5049,20 +5305,49 @@
       </p:sp>
       <p:sp>
         <p:nvSpPr>
-          <p:cNvPr id="14" name="번호 3"/>
+          <p:cNvPr id="17" name="포인트 막대"/>
           <p:cNvSpPr/>
           <p:nvPr/>
         </p:nvSpPr>
         <p:spPr>
           <a:xfrm>
-            <a:off x="822959" y="4160520"/>
+            <a:off x="640080" y="4178808"/>
+            <a:ext cx="54864" cy="786384"/>
+          </a:xfrm>
+          <a:prstGeom prst="rect">
+            <a:avLst/>
+          </a:prstGeom>
+          <a:solidFill>
+            <a:srgbClr val="C997ED"/>
+          </a:solidFill>
+          <a:ln>
+            <a:noFill/>
+          </a:ln>
+        </p:spPr>
+        <p:txBody>
+          <a:bodyPr rtlCol="0" anchor="ctr"/>
+          <a:lstStyle/>
+          <a:p>
+            <a:pPr algn="ctr"/>
+          </a:p>
+        </p:txBody>
+      </p:sp>
+      <p:sp>
+        <p:nvSpPr>
+          <p:cNvPr id="18" name="번호 3"/>
+          <p:cNvSpPr/>
+          <p:nvPr/>
+        </p:nvSpPr>
+        <p:spPr>
+          <a:xfrm>
+            <a:off x="822959" y="4343400"/>
             <a:ext cx="457200" cy="457200"/>
           </a:xfrm>
           <a:prstGeom prst="ellipse">
             <a:avLst/>
           </a:prstGeom>
           <a:solidFill>
-            <a:srgbClr val="9651C8"/>
+            <a:srgbClr val="C997ED"/>
           </a:solidFill>
           <a:ln>
             <a:noFill/>
@@ -5082,7 +5367,7 @@
             <a:r>
               <a:rPr sz="1600" b="1" i="0">
                 <a:solidFill>
-                  <a:srgbClr val="FFFFFF"/>
+                  <a:srgbClr val="26231F"/>
                 </a:solidFill>
               </a:rPr>
               <a:t>3</a:t>
@@ -5092,13 +5377,13 @@
       </p:sp>
       <p:sp>
         <p:nvSpPr>
-          <p:cNvPr id="15" name="TextBox 14"/>
+          <p:cNvPr id="19" name="TextBox 18"/>
           <p:cNvSpPr txBox="1"/>
           <p:nvPr/>
         </p:nvSpPr>
         <p:spPr>
           <a:xfrm>
-            <a:off x="1508760" y="3931920"/>
+            <a:off x="1508760" y="4114800"/>
             <a:ext cx="2743200" cy="914400"/>
           </a:xfrm>
           <a:prstGeom prst="rect">
@@ -5120,7 +5405,7 @@
             <a:r>
               <a:rPr sz="1800" b="1" i="0">
                 <a:solidFill>
-                  <a:srgbClr val="4E226D"/>
+                  <a:srgbClr val="3B2749"/>
                 </a:solidFill>
               </a:rPr>
               <a:t>약속 3</a:t>
@@ -5130,13 +5415,13 @@
       </p:sp>
       <p:sp>
         <p:nvSpPr>
-          <p:cNvPr id="16" name="TextBox 15"/>
+          <p:cNvPr id="20" name="TextBox 19"/>
           <p:cNvSpPr txBox="1"/>
           <p:nvPr/>
         </p:nvSpPr>
         <p:spPr>
           <a:xfrm>
-            <a:off x="4297680" y="3931920"/>
+            <a:off x="4297680" y="4114800"/>
             <a:ext cx="7071055" cy="914400"/>
           </a:xfrm>
           <a:prstGeom prst="rect">
@@ -5158,7 +5443,7 @@
             <a:r>
               <a:rPr sz="1700" b="0" i="0">
                 <a:solidFill>
-                  <a:srgbClr val="2B2B2B"/>
+                  <a:srgbClr val="26231F"/>
                 </a:solidFill>
               </a:rPr>
               <a:t>한 달에 한 번 데이트하기</a:t>
@@ -5200,14 +5485,14 @@
         </p:nvSpPr>
         <p:spPr>
           <a:xfrm>
-            <a:off x="9905695" y="-1463040"/>
-            <a:ext cx="3840480" cy="3840480"/>
-          </a:xfrm>
-          <a:prstGeom prst="ellipse">
+            <a:off x="640080" y="566928"/>
+            <a:ext cx="10911535" cy="10972"/>
+          </a:xfrm>
+          <a:prstGeom prst="rect">
             <a:avLst/>
           </a:prstGeom>
           <a:solidFill>
-            <a:srgbClr val="E8D4F7"/>
+            <a:srgbClr val="26231F"/>
           </a:solidFill>
           <a:ln>
             <a:noFill/>
@@ -5223,20 +5508,58 @@
       </p:sp>
       <p:sp>
         <p:nvSpPr>
-          <p:cNvPr id="4" name="장식"/>
+          <p:cNvPr id="4" name="상단 라벨"/>
+          <p:cNvSpPr txBox="1"/>
+          <p:nvPr/>
+        </p:nvSpPr>
+        <p:spPr>
+          <a:xfrm>
+            <a:off x="640080" y="237744"/>
+            <a:ext cx="5486400" cy="274320"/>
+          </a:xfrm>
+          <a:prstGeom prst="rect">
+            <a:avLst/>
+          </a:prstGeom>
+          <a:noFill/>
+        </p:spPr>
+        <p:txBody>
+          <a:bodyPr wrap="square" lIns="54864" rIns="54864" tIns="27432" bIns="27432" anchor="ctr">
+            <a:noAutofit/>
+          </a:bodyPr>
+          <a:lstStyle/>
+          <a:p>
+            <a:pPr algn="l">
+              <a:lnSpc>
+                <a:spcPct val="115000"/>
+              </a:lnSpc>
+            </a:pPr>
+            <a:r>
+              <a:rPr sz="900" b="1" i="0" spc="250">
+                <a:solidFill>
+                  <a:srgbClr val="26231F"/>
+                </a:solidFill>
+              </a:rPr>
+              <a:t>FAMILY ALBUM</a:t>
+            </a:r>
+          </a:p>
+        </p:txBody>
+      </p:sp>
+      <p:sp>
+        <p:nvSpPr>
+          <p:cNvPr id="5" name="포인트"/>
           <p:cNvSpPr/>
           <p:nvPr/>
         </p:nvSpPr>
         <p:spPr>
           <a:xfrm>
-            <a:off x="11094415" y="274320"/>
-            <a:ext cx="411480" cy="411480"/>
-          </a:xfrm>
-          <a:prstGeom prst="ellipse">
+            <a:off x="11204143" y="246888"/>
+            <a:ext cx="237744" cy="237744"/>
+          </a:xfrm>
+          <a:prstGeom prst="round2SameRect">
             <a:avLst/>
           </a:prstGeom>
           <a:solidFill>
-            <a:srgbClr val="9651C8"/>
+            <a:srgbClr val="C997ED"/>
           </a:solidFill>
           <a:ln>
             <a:noFill/>
@@ -5262,8 +5585,8 @@
         </p:nvSpPr>
         <p:spPr>
           <a:xfrm>
-            <a:off x="640080" y="457200"/>
-            <a:ext cx="9722815" cy="868680"/>
+            <a:off x="640080" y="731520"/>
+            <a:ext cx="10911535" cy="822960"/>
           </a:xfrm>
         </p:spPr>
         <p:txBody>
@@ -5280,7 +5603,7 @@
             <a:r>
               <a:rPr sz="3000" b="1" i="0">
                 <a:solidFill>
-                  <a:srgbClr val="4E226D"/>
+                  <a:srgbClr val="26231F"/>
                 </a:solidFill>
               </a:rPr>
               <a:t>가족 사진</a:t>
@@ -5290,14 +5613,14 @@
       </p:sp>
       <p:sp>
         <p:nvSpPr>
-          <p:cNvPr id="5" name="사진 자리"/>
+          <p:cNvPr id="6" name="사진 자리"/>
           <p:cNvSpPr/>
           <p:nvPr/>
         </p:nvSpPr>
         <p:spPr>
           <a:xfrm>
-            <a:off x="640080" y="1600200"/>
-            <a:ext cx="3515258" cy="2308860"/>
+            <a:off x="640080" y="1783080"/>
+            <a:ext cx="3515258" cy="2194560"/>
           </a:xfrm>
           <a:prstGeom prst="roundRect">
             <a:avLst>
@@ -5305,12 +5628,10 @@
             </a:avLst>
           </a:prstGeom>
           <a:solidFill>
-            <a:srgbClr val="E8D4F7"/>
+            <a:srgbClr val="E9D1FA"/>
           </a:solidFill>
           <a:ln w="19050">
-            <a:solidFill>
-              <a:srgbClr val="9651C8"/>
-            </a:solidFill>
+            <a:noFill/>
             <a:prstDash val="dash"/>
           </a:ln>
         </p:spPr>
@@ -5328,7 +5649,7 @@
             <a:r>
               <a:rPr sz="1200" b="0" i="0">
                 <a:solidFill>
-                  <a:srgbClr val="4E226D"/>
+                  <a:srgbClr val="8E8780"/>
                 </a:solidFill>
               </a:rPr>
               <a:t>사진 1</a:t>
@@ -5338,14 +5659,14 @@
       </p:sp>
       <p:sp>
         <p:nvSpPr>
-          <p:cNvPr id="6" name="사진 자리"/>
+          <p:cNvPr id="7" name="사진 자리"/>
           <p:cNvSpPr/>
           <p:nvPr/>
         </p:nvSpPr>
         <p:spPr>
           <a:xfrm>
-            <a:off x="4338218" y="1600200"/>
-            <a:ext cx="3515258" cy="2308860"/>
+            <a:off x="4338218" y="1783080"/>
+            <a:ext cx="3515258" cy="2194560"/>
           </a:xfrm>
           <a:prstGeom prst="roundRect">
             <a:avLst>
@@ -5353,12 +5674,10 @@
             </a:avLst>
           </a:prstGeom>
           <a:solidFill>
-            <a:srgbClr val="E8D4F7"/>
+            <a:srgbClr val="E9D1FA"/>
           </a:solidFill>
           <a:ln w="19050">
-            <a:solidFill>
-              <a:srgbClr val="9651C8"/>
-            </a:solidFill>
+            <a:noFill/>
             <a:prstDash val="dash"/>
           </a:ln>
         </p:spPr>
@@ -5376,7 +5695,7 @@
             <a:r>
               <a:rPr sz="1200" b="0" i="0">
                 <a:solidFill>
-                  <a:srgbClr val="4E226D"/>
+                  <a:srgbClr val="8E8780"/>
                 </a:solidFill>
               </a:rPr>
               <a:t>사진 2</a:t>
@@ -5386,14 +5705,14 @@
       </p:sp>
       <p:sp>
         <p:nvSpPr>
-          <p:cNvPr id="7" name="사진 자리"/>
+          <p:cNvPr id="8" name="사진 자리"/>
           <p:cNvSpPr/>
           <p:nvPr/>
         </p:nvSpPr>
         <p:spPr>
           <a:xfrm>
-            <a:off x="8036356" y="1600200"/>
-            <a:ext cx="3515258" cy="2308860"/>
+            <a:off x="8036356" y="1783080"/>
+            <a:ext cx="3515258" cy="2194560"/>
           </a:xfrm>
           <a:prstGeom prst="roundRect">
             <a:avLst>
@@ -5401,12 +5720,10 @@
             </a:avLst>
           </a:prstGeom>
           <a:solidFill>
-            <a:srgbClr val="E8D4F7"/>
+            <a:srgbClr val="E9D1FA"/>
           </a:solidFill>
           <a:ln w="19050">
-            <a:solidFill>
-              <a:srgbClr val="9651C8"/>
-            </a:solidFill>
+            <a:noFill/>
             <a:prstDash val="dash"/>
           </a:ln>
         </p:spPr>
@@ -5424,7 +5741,7 @@
             <a:r>
               <a:rPr sz="1200" b="0" i="0">
                 <a:solidFill>
-                  <a:srgbClr val="4E226D"/>
+                  <a:srgbClr val="8E8780"/>
                 </a:solidFill>
               </a:rPr>
               <a:t>사진 3</a:t>
@@ -5434,14 +5751,14 @@
       </p:sp>
       <p:sp>
         <p:nvSpPr>
-          <p:cNvPr id="8" name="사진 자리"/>
+          <p:cNvPr id="9" name="사진 자리"/>
           <p:cNvSpPr/>
           <p:nvPr/>
         </p:nvSpPr>
         <p:spPr>
           <a:xfrm>
-            <a:off x="640080" y="4091939"/>
-            <a:ext cx="3515258" cy="2308860"/>
+            <a:off x="640080" y="4160520"/>
+            <a:ext cx="3515258" cy="2194560"/>
           </a:xfrm>
           <a:prstGeom prst="roundRect">
             <a:avLst>
@@ -5449,12 +5766,10 @@
             </a:avLst>
           </a:prstGeom>
           <a:solidFill>
-            <a:srgbClr val="E8D4F7"/>
+            <a:srgbClr val="E9D1FA"/>
           </a:solidFill>
           <a:ln w="19050">
-            <a:solidFill>
-              <a:srgbClr val="9651C8"/>
-            </a:solidFill>
+            <a:noFill/>
             <a:prstDash val="dash"/>
           </a:ln>
         </p:spPr>
@@ -5472,7 +5787,7 @@
             <a:r>
               <a:rPr sz="1200" b="0" i="0">
                 <a:solidFill>
-                  <a:srgbClr val="4E226D"/>
+                  <a:srgbClr val="8E8780"/>
                 </a:solidFill>
               </a:rPr>
               <a:t>사진 4</a:t>
@@ -5482,14 +5797,14 @@
       </p:sp>
       <p:sp>
         <p:nvSpPr>
-          <p:cNvPr id="9" name="사진 자리"/>
+          <p:cNvPr id="10" name="사진 자리"/>
           <p:cNvSpPr/>
           <p:nvPr/>
         </p:nvSpPr>
         <p:spPr>
           <a:xfrm>
-            <a:off x="4338218" y="4091939"/>
-            <a:ext cx="3515258" cy="2308860"/>
+            <a:off x="4338218" y="4160520"/>
+            <a:ext cx="3515258" cy="2194560"/>
           </a:xfrm>
           <a:prstGeom prst="roundRect">
             <a:avLst>
@@ -5497,12 +5812,10 @@
             </a:avLst>
           </a:prstGeom>
           <a:solidFill>
-            <a:srgbClr val="E8D4F7"/>
+            <a:srgbClr val="E9D1FA"/>
           </a:solidFill>
           <a:ln w="19050">
-            <a:solidFill>
-              <a:srgbClr val="9651C8"/>
-            </a:solidFill>
+            <a:noFill/>
             <a:prstDash val="dash"/>
           </a:ln>
         </p:spPr>
@@ -5520,7 +5833,7 @@
             <a:r>
               <a:rPr sz="1200" b="0" i="0">
                 <a:solidFill>
-                  <a:srgbClr val="4E226D"/>
+                  <a:srgbClr val="8E8780"/>
                 </a:solidFill>
               </a:rPr>
               <a:t>사진 5</a:t>
@@ -5530,14 +5843,14 @@
       </p:sp>
       <p:sp>
         <p:nvSpPr>
-          <p:cNvPr id="10" name="사진 자리"/>
+          <p:cNvPr id="11" name="사진 자리"/>
           <p:cNvSpPr/>
           <p:nvPr/>
         </p:nvSpPr>
         <p:spPr>
           <a:xfrm>
-            <a:off x="8036356" y="4091939"/>
-            <a:ext cx="3515258" cy="2308860"/>
+            <a:off x="8036356" y="4160520"/>
+            <a:ext cx="3515258" cy="2194560"/>
           </a:xfrm>
           <a:prstGeom prst="roundRect">
             <a:avLst>
@@ -5545,12 +5858,10 @@
             </a:avLst>
           </a:prstGeom>
           <a:solidFill>
-            <a:srgbClr val="E8D4F7"/>
+            <a:srgbClr val="E9D1FA"/>
           </a:solidFill>
           <a:ln w="19050">
-            <a:solidFill>
-              <a:srgbClr val="9651C8"/>
-            </a:solidFill>
+            <a:noFill/>
             <a:prstDash val="dash"/>
           </a:ln>
         </p:spPr>
@@ -5568,7 +5879,7 @@
             <a:r>
               <a:rPr sz="1200" b="0" i="0">
                 <a:solidFill>
-                  <a:srgbClr val="4E226D"/>
+                  <a:srgbClr val="8E8780"/>
                 </a:solidFill>
               </a:rPr>
               <a:t>사진 6</a:t>
@@ -5587,6 +5898,14 @@
 <file path=ppt/slides/slide6.xml><?xml version="1.0" encoding="utf-8"?>
 <p:sld xmlns:a="http://schemas.openxmlformats.org/drawingml/2006/main" xmlns:p="http://schemas.openxmlformats.org/presentationml/2006/main" xmlns:r="http://schemas.openxmlformats.org/officeDocument/2006/relationships">
   <p:cSld>
+    <p:bg>
+      <p:bgPr>
+        <a:solidFill>
+          <a:srgbClr val="F5EAFD"/>
+        </a:solidFill>
+        <a:effectLst/>
+      </p:bgPr>
+    </p:bg>
     <p:spTree>
       <p:nvGrpSpPr>
         <p:cNvPr id="1" name=""/>
@@ -5594,30 +5913,116 @@
         <p:nvPr/>
       </p:nvGrpSpPr>
       <p:grpSpPr/>
-      <p:pic>
-        <p:nvPicPr>
-          <p:cNvPr id="3" name="표지 그림" descr="family-11.jpg"/>
-          <p:cNvPicPr>
-            <a:picLocks noChangeAspect="1"/>
-          </p:cNvPicPr>
-          <p:nvPr/>
-        </p:nvPicPr>
-        <p:blipFill>
-          <a:blip r:embed="rId2"/>
-          <a:stretch>
-            <a:fillRect/>
-          </a:stretch>
-        </p:blipFill>
+      <p:sp>
+        <p:nvSpPr>
+          <p:cNvPr id="3" name="사진 자리"/>
+          <p:cNvSpPr/>
+          <p:nvPr/>
+        </p:nvSpPr>
         <p:spPr>
           <a:xfrm>
             <a:off x="0" y="0"/>
-            <a:ext cx="12191695" cy="6858000"/>
+            <a:ext cx="4389010" cy="6858000"/>
           </a:xfrm>
           <a:prstGeom prst="rect">
             <a:avLst/>
           </a:prstGeom>
-        </p:spPr>
-      </p:pic>
+          <a:solidFill>
+            <a:srgbClr val="D2A6F2"/>
+          </a:solidFill>
+          <a:ln>
+            <a:noFill/>
+          </a:ln>
+        </p:spPr>
+        <p:txBody>
+          <a:bodyPr rtlCol="0" anchor="ctr" wrap="square" lIns="54864" rIns="54864" tIns="27432" bIns="27432">
+            <a:noAutofit/>
+          </a:bodyPr>
+          <a:lstStyle/>
+          <a:p>
+            <a:pPr algn="ctr">
+              <a:lnSpc>
+                <a:spcPct val="100000"/>
+              </a:lnSpc>
+            </a:pPr>
+            <a:r>
+              <a:rPr sz="1400" b="0" i="0">
+                <a:solidFill>
+                  <a:srgbClr val="3B2749"/>
+                </a:solidFill>
+              </a:rPr>
+              <a:t>사진을 넣어 주세요</a:t>
+            </a:r>
+          </a:p>
+        </p:txBody>
+      </p:sp>
+      <p:sp>
+        <p:nvSpPr>
+          <p:cNvPr id="4" name="장식"/>
+          <p:cNvSpPr/>
+          <p:nvPr/>
+        </p:nvSpPr>
+        <p:spPr>
+          <a:xfrm>
+            <a:off x="365750" y="365760"/>
+            <a:ext cx="3657508" cy="6126480"/>
+          </a:xfrm>
+          <a:prstGeom prst="rect">
+            <a:avLst/>
+          </a:prstGeom>
+          <a:noFill/>
+          <a:ln w="9525">
+            <a:solidFill>
+              <a:srgbClr val="26231F"/>
+            </a:solidFill>
+          </a:ln>
+        </p:spPr>
+        <p:txBody>
+          <a:bodyPr rtlCol="0" anchor="ctr"/>
+          <a:lstStyle/>
+          <a:p>
+            <a:pPr algn="ctr"/>
+          </a:p>
+        </p:txBody>
+      </p:sp>
+      <p:sp>
+        <p:nvSpPr>
+          <p:cNvPr id="5" name="라벨"/>
+          <p:cNvSpPr txBox="1"/>
+          <p:nvPr/>
+        </p:nvSpPr>
+        <p:spPr>
+          <a:xfrm>
+            <a:off x="6827349" y="2148840"/>
+            <a:ext cx="4632844" cy="274320"/>
+          </a:xfrm>
+          <a:prstGeom prst="rect">
+            <a:avLst/>
+          </a:prstGeom>
+          <a:noFill/>
+        </p:spPr>
+        <p:txBody>
+          <a:bodyPr wrap="square" lIns="54864" rIns="54864" tIns="27432" bIns="27432" anchor="t">
+            <a:noAutofit/>
+          </a:bodyPr>
+          <a:lstStyle/>
+          <a:p>
+            <a:pPr algn="l">
+              <a:lnSpc>
+                <a:spcPct val="115000"/>
+              </a:lnSpc>
+            </a:pPr>
+            <a:r>
+              <a:rPr sz="1000" b="1" i="0" spc="250">
+                <a:solidFill>
+                  <a:srgbClr val="26231F"/>
+                </a:solidFill>
+              </a:rPr>
+              <a:t>FAMILY ALBUM</a:t>
+            </a:r>
+          </a:p>
+        </p:txBody>
+      </p:sp>
       <p:sp>
         <p:nvSpPr>
           <p:cNvPr id="2" name="Title 1"/>
@@ -5630,8 +6035,8 @@
         </p:nvSpPr>
         <p:spPr>
           <a:xfrm>
-            <a:off x="853418" y="2057400"/>
-            <a:ext cx="6095847" cy="1554480"/>
+            <a:off x="6827349" y="2606040"/>
+            <a:ext cx="4632844" cy="1188720"/>
           </a:xfrm>
         </p:spPr>
         <p:txBody>
@@ -5646,9 +6051,9 @@
               </a:lnSpc>
             </a:pPr>
             <a:r>
-              <a:rPr sz="3600" b="1" i="0">
-                <a:solidFill>
-                  <a:srgbClr val="4E226D"/>
+              <a:rPr sz="4000" b="1" i="0">
+                <a:solidFill>
+                  <a:srgbClr val="26231F"/>
                 </a:solidFill>
               </a:rPr>
               <a:t>우리 가족 소개를 마칩니다</a:t>
@@ -5658,14 +6063,14 @@
       </p:sp>
       <p:sp>
         <p:nvSpPr>
-          <p:cNvPr id="4" name="한 줄 문구"/>
+          <p:cNvPr id="6" name="한 줄 문구"/>
           <p:cNvSpPr txBox="1"/>
           <p:nvPr/>
         </p:nvSpPr>
         <p:spPr>
           <a:xfrm>
-            <a:off x="853418" y="3749039"/>
-            <a:ext cx="6095847" cy="822960"/>
+            <a:off x="6827349" y="3886200"/>
+            <a:ext cx="4632844" cy="822960"/>
           </a:xfrm>
           <a:prstGeom prst="rect">
             <a:avLst/>
@@ -5684,9 +6089,9 @@
               </a:lnSpc>
             </a:pPr>
             <a:r>
-              <a:rPr sz="1700" b="0" i="1">
-                <a:solidFill>
-                  <a:srgbClr val="4E226D"/>
+              <a:rPr sz="1700" b="0" i="0">
+                <a:solidFill>
+                  <a:srgbClr val="26231F"/>
                 </a:solidFill>
               </a:rPr>
               <a:t>읽어 주셔서 고맙습니다</a:t>
@@ -5696,14 +6101,14 @@
       </p:sp>
       <p:sp>
         <p:nvSpPr>
-          <p:cNvPr id="5" name="안내 문구"/>
+          <p:cNvPr id="7" name="안내 문구"/>
           <p:cNvSpPr txBox="1"/>
           <p:nvPr/>
         </p:nvSpPr>
         <p:spPr>
           <a:xfrm>
-            <a:off x="853418" y="4617720"/>
-            <a:ext cx="6095847" cy="914400"/>
+            <a:off x="6827349" y="4754880"/>
+            <a:ext cx="4632844" cy="914400"/>
           </a:xfrm>
           <a:prstGeom prst="rect">
             <a:avLst/>
@@ -5724,7 +6129,7 @@
             <a:r>
               <a:rPr sz="1400" b="0" i="0">
                 <a:solidFill>
-                  <a:srgbClr val="666666"/>
+                  <a:srgbClr val="26231F"/>
                 </a:solidFill>
               </a:rPr>
               <a:t>고맙습니다 · 가족 이름</a:t>
@@ -5751,34 +6156,34 @@
         <a:sysClr val="window" lastClr="FFFFFF"/>
       </a:lt1>
       <a:dk2>
-        <a:srgbClr val="4E226D"/>
+        <a:srgbClr val="3B2749"/>
       </a:dk2>
       <a:lt2>
-        <a:srgbClr val="F8F3FC"/>
+        <a:srgbClr val="F5EAFD"/>
       </a:lt2>
       <a:accent1>
-        <a:srgbClr val="9651C8"/>
+        <a:srgbClr val="C997ED"/>
       </a:accent1>
       <a:accent2>
-        <a:srgbClr val="339941"/>
+        <a:srgbClr val="F3BAF0"/>
       </a:accent2>
       <a:accent3>
-        <a:srgbClr val="4E226D"/>
+        <a:srgbClr val="3B2749"/>
       </a:accent3>
       <a:accent4>
-        <a:srgbClr val="E8D4F7"/>
+        <a:srgbClr val="E9D1FA"/>
       </a:accent4>
       <a:accent5>
-        <a:srgbClr val="647584"/>
+        <a:srgbClr val="DEA8EE"/>
       </a:accent5>
       <a:accent6>
-        <a:srgbClr val="957AA7"/>
+        <a:srgbClr val="897D92"/>
       </a:accent6>
       <a:hlink>
-        <a:srgbClr val="9651C8"/>
+        <a:srgbClr val="C997ED"/>
       </a:hlink>
       <a:folHlink>
-        <a:srgbClr val="4E226D"/>
+        <a:srgbClr val="3B2749"/>
       </a:folHlink>
     </a:clrScheme>
     <a:fontScheme name="Office">
